--- a/CalendarioAgo2026/presentaciones/11_Strings.pptx
+++ b/CalendarioAgo2026/presentaciones/11_Strings.pptx
@@ -5,25 +5,24 @@
     <p:sldMasterId id="2147483648" r:id="rId1"/>
   </p:sldMasterIdLst>
   <p:notesMasterIdLst>
-    <p:notesMasterId r:id="rId18"/>
+    <p:notesMasterId r:id="rId17"/>
   </p:notesMasterIdLst>
   <p:sldIdLst>
     <p:sldId id="283" r:id="rId2"/>
     <p:sldId id="259" r:id="rId3"/>
     <p:sldId id="261" r:id="rId4"/>
     <p:sldId id="269" r:id="rId5"/>
-    <p:sldId id="270" r:id="rId6"/>
-    <p:sldId id="271" r:id="rId7"/>
-    <p:sldId id="291" r:id="rId8"/>
-    <p:sldId id="263" r:id="rId9"/>
-    <p:sldId id="284" r:id="rId10"/>
-    <p:sldId id="285" r:id="rId11"/>
-    <p:sldId id="286" r:id="rId12"/>
-    <p:sldId id="289" r:id="rId13"/>
-    <p:sldId id="290" r:id="rId14"/>
-    <p:sldId id="287" r:id="rId15"/>
-    <p:sldId id="288" r:id="rId16"/>
-    <p:sldId id="282" r:id="rId17"/>
+    <p:sldId id="271" r:id="rId6"/>
+    <p:sldId id="291" r:id="rId7"/>
+    <p:sldId id="263" r:id="rId8"/>
+    <p:sldId id="284" r:id="rId9"/>
+    <p:sldId id="285" r:id="rId10"/>
+    <p:sldId id="286" r:id="rId11"/>
+    <p:sldId id="289" r:id="rId12"/>
+    <p:sldId id="290" r:id="rId13"/>
+    <p:sldId id="287" r:id="rId14"/>
+    <p:sldId id="288" r:id="rId15"/>
+    <p:sldId id="282" r:id="rId16"/>
   </p:sldIdLst>
   <p:sldSz cx="9144000" cy="6858000" type="screen4x3"/>
   <p:notesSz cx="6858000" cy="9144000"/>
@@ -141,6 +140,42 @@
 </p:presentation>
 </file>
 
+<file path=ppt/changesInfos/changesInfo1.xml><?xml version="1.0" encoding="utf-8"?>
+<pc:chgInfo xmlns:a="http://schemas.openxmlformats.org/drawingml/2006/main" xmlns:r="http://schemas.openxmlformats.org/officeDocument/2006/relationships" xmlns:ac="http://schemas.microsoft.com/office/drawing/2013/main/command" xmlns:pc="http://schemas.microsoft.com/office/powerpoint/2013/main/command">
+  <pc:docChgLst>
+    <pc:chgData name="Lizethe Pérez Fuertes" userId="4ae9ef87-2a7d-42f8-8dfa-0a501a9e2ff4" providerId="ADAL" clId="{FDDD45CB-1330-4033-A842-3D2746AFF7C7}"/>
+    <pc:docChg chg="custSel delSld modSld">
+      <pc:chgData name="Lizethe Pérez Fuertes" userId="4ae9ef87-2a7d-42f8-8dfa-0a501a9e2ff4" providerId="ADAL" clId="{FDDD45CB-1330-4033-A842-3D2746AFF7C7}" dt="2026-08-07T01:15:12.353" v="19" actId="47"/>
+      <pc:docMkLst>
+        <pc:docMk/>
+      </pc:docMkLst>
+      <pc:sldChg chg="del">
+        <pc:chgData name="Lizethe Pérez Fuertes" userId="4ae9ef87-2a7d-42f8-8dfa-0a501a9e2ff4" providerId="ADAL" clId="{FDDD45CB-1330-4033-A842-3D2746AFF7C7}" dt="2026-08-07T01:15:12.353" v="19" actId="47"/>
+        <pc:sldMkLst>
+          <pc:docMk/>
+          <pc:sldMk cId="3247842942" sldId="270"/>
+        </pc:sldMkLst>
+      </pc:sldChg>
+      <pc:sldChg chg="modSp mod">
+        <pc:chgData name="Lizethe Pérez Fuertes" userId="4ae9ef87-2a7d-42f8-8dfa-0a501a9e2ff4" providerId="ADAL" clId="{FDDD45CB-1330-4033-A842-3D2746AFF7C7}" dt="2026-08-07T01:13:10.287" v="18" actId="27636"/>
+        <pc:sldMkLst>
+          <pc:docMk/>
+          <pc:sldMk cId="1182132109" sldId="283"/>
+        </pc:sldMkLst>
+        <pc:spChg chg="mod">
+          <ac:chgData name="Lizethe Pérez Fuertes" userId="4ae9ef87-2a7d-42f8-8dfa-0a501a9e2ff4" providerId="ADAL" clId="{FDDD45CB-1330-4033-A842-3D2746AFF7C7}" dt="2026-08-07T01:13:10.287" v="18" actId="27636"/>
+          <ac:spMkLst>
+            <pc:docMk/>
+            <pc:sldMk cId="1182132109" sldId="283"/>
+            <ac:spMk id="7" creationId="{C76FDE9F-BE31-4C18-94A8-6C66B7C80D3B}"/>
+          </ac:spMkLst>
+        </pc:spChg>
+      </pc:sldChg>
+    </pc:docChg>
+  </pc:docChgLst>
+</pc:chgInfo>
+</file>
+
 <file path=ppt/notesMasters/notesMaster1.xml><?xml version="1.0" encoding="utf-8"?>
 <p:notesMaster xmlns:a="http://schemas.openxmlformats.org/drawingml/2006/main" xmlns:r="http://schemas.openxmlformats.org/officeDocument/2006/relationships" xmlns:p="http://schemas.openxmlformats.org/presentationml/2006/main">
   <p:cSld>
@@ -223,7 +258,7 @@
           <a:p>
             <a:fld id="{55C7BC42-2F9C-4966-894F-B6FA6F3C1DB8}" type="datetimeFigureOut">
               <a:rPr lang="es-MX" smtClean="0"/>
-              <a:t>02/10/2023</a:t>
+              <a:t>06/08/2026</a:t>
             </a:fld>
             <a:endParaRPr lang="es-MX" dirty="0"/>
           </a:p>
@@ -556,7 +591,7 @@
           <a:p>
             <a:fld id="{22F32190-7968-4437-BE88-4F1E072F1C89}" type="slidenum">
               <a:rPr lang="es-MX" smtClean="0"/>
-              <a:t>6</a:t>
+              <a:t>5</a:t>
             </a:fld>
             <a:endParaRPr lang="es-MX" dirty="0"/>
           </a:p>
@@ -756,7 +791,7 @@
           <a:p>
             <a:fld id="{47016A6E-E1CA-4694-BCEE-11D49EEFA04C}" type="datetimeFigureOut">
               <a:rPr lang="es-MX" smtClean="0"/>
-              <a:t>02/10/2023</a:t>
+              <a:t>06/08/2026</a:t>
             </a:fld>
             <a:endParaRPr lang="es-MX" dirty="0"/>
           </a:p>
@@ -926,7 +961,7 @@
           <a:p>
             <a:fld id="{47016A6E-E1CA-4694-BCEE-11D49EEFA04C}" type="datetimeFigureOut">
               <a:rPr lang="es-MX" smtClean="0"/>
-              <a:t>02/10/2023</a:t>
+              <a:t>06/08/2026</a:t>
             </a:fld>
             <a:endParaRPr lang="es-MX" dirty="0"/>
           </a:p>
@@ -1106,7 +1141,7 @@
           <a:p>
             <a:fld id="{47016A6E-E1CA-4694-BCEE-11D49EEFA04C}" type="datetimeFigureOut">
               <a:rPr lang="es-MX" smtClean="0"/>
-              <a:t>02/10/2023</a:t>
+              <a:t>06/08/2026</a:t>
             </a:fld>
             <a:endParaRPr lang="es-MX" dirty="0"/>
           </a:p>
@@ -1259,7 +1294,7 @@
           <a:p>
             <a:fld id="{1D8BD707-D9CF-40AE-B4C6-C98DA3205C09}" type="datetimeFigureOut">
               <a:rPr lang="en-US" smtClean="0"/>
-              <a:t>10/2/2023</a:t>
+              <a:t>8/6/2026</a:t>
             </a:fld>
             <a:endParaRPr lang="en-US"/>
           </a:p>
@@ -1419,7 +1454,7 @@
           <a:p>
             <a:fld id="{47016A6E-E1CA-4694-BCEE-11D49EEFA04C}" type="datetimeFigureOut">
               <a:rPr lang="es-MX" smtClean="0"/>
-              <a:t>02/10/2023</a:t>
+              <a:t>06/08/2026</a:t>
             </a:fld>
             <a:endParaRPr lang="es-MX" dirty="0"/>
           </a:p>
@@ -1665,7 +1700,7 @@
           <a:p>
             <a:fld id="{47016A6E-E1CA-4694-BCEE-11D49EEFA04C}" type="datetimeFigureOut">
               <a:rPr lang="es-MX" smtClean="0"/>
-              <a:t>02/10/2023</a:t>
+              <a:t>06/08/2026</a:t>
             </a:fld>
             <a:endParaRPr lang="es-MX" dirty="0"/>
           </a:p>
@@ -1953,7 +1988,7 @@
           <a:p>
             <a:fld id="{47016A6E-E1CA-4694-BCEE-11D49EEFA04C}" type="datetimeFigureOut">
               <a:rPr lang="es-MX" smtClean="0"/>
-              <a:t>02/10/2023</a:t>
+              <a:t>06/08/2026</a:t>
             </a:fld>
             <a:endParaRPr lang="es-MX" dirty="0"/>
           </a:p>
@@ -2375,7 +2410,7 @@
           <a:p>
             <a:fld id="{47016A6E-E1CA-4694-BCEE-11D49EEFA04C}" type="datetimeFigureOut">
               <a:rPr lang="es-MX" smtClean="0"/>
-              <a:t>02/10/2023</a:t>
+              <a:t>06/08/2026</a:t>
             </a:fld>
             <a:endParaRPr lang="es-MX" dirty="0"/>
           </a:p>
@@ -2493,7 +2528,7 @@
           <a:p>
             <a:fld id="{47016A6E-E1CA-4694-BCEE-11D49EEFA04C}" type="datetimeFigureOut">
               <a:rPr lang="es-MX" smtClean="0"/>
-              <a:t>02/10/2023</a:t>
+              <a:t>06/08/2026</a:t>
             </a:fld>
             <a:endParaRPr lang="es-MX" dirty="0"/>
           </a:p>
@@ -2588,7 +2623,7 @@
           <a:p>
             <a:fld id="{47016A6E-E1CA-4694-BCEE-11D49EEFA04C}" type="datetimeFigureOut">
               <a:rPr lang="es-MX" smtClean="0"/>
-              <a:t>02/10/2023</a:t>
+              <a:t>06/08/2026</a:t>
             </a:fld>
             <a:endParaRPr lang="es-MX" dirty="0"/>
           </a:p>
@@ -2865,7 +2900,7 @@
           <a:p>
             <a:fld id="{47016A6E-E1CA-4694-BCEE-11D49EEFA04C}" type="datetimeFigureOut">
               <a:rPr lang="es-MX" smtClean="0"/>
-              <a:t>02/10/2023</a:t>
+              <a:t>06/08/2026</a:t>
             </a:fld>
             <a:endParaRPr lang="es-MX" dirty="0"/>
           </a:p>
@@ -3118,7 +3153,7 @@
           <a:p>
             <a:fld id="{47016A6E-E1CA-4694-BCEE-11D49EEFA04C}" type="datetimeFigureOut">
               <a:rPr lang="es-MX" smtClean="0"/>
-              <a:t>02/10/2023</a:t>
+              <a:t>06/08/2026</a:t>
             </a:fld>
             <a:endParaRPr lang="es-MX" dirty="0"/>
           </a:p>
@@ -3331,7 +3366,7 @@
           <a:p>
             <a:fld id="{47016A6E-E1CA-4694-BCEE-11D49EEFA04C}" type="datetimeFigureOut">
               <a:rPr lang="es-MX" smtClean="0"/>
-              <a:t>02/10/2023</a:t>
+              <a:t>06/08/2026</a:t>
             </a:fld>
             <a:endParaRPr lang="es-MX" dirty="0"/>
           </a:p>
@@ -3821,17 +3856,17 @@
               <a:defRPr/>
             </a:pPr>
             <a:r>
-              <a:rPr lang="es-MX" sz="3200">
+              <a:rPr lang="es-MX" sz="3200" dirty="0">
                 <a:solidFill>
                   <a:schemeClr val="bg2">
                     <a:lumMod val="50000"/>
                   </a:schemeClr>
                 </a:solidFill>
               </a:rPr>
-              <a:t>TC1028 </a:t>
+              <a:t>TC 1037 </a:t>
             </a:r>
             <a:br>
-              <a:rPr lang="es-MX" sz="3200">
+              <a:rPr lang="es-MX" sz="3200" dirty="0">
                 <a:solidFill>
                   <a:schemeClr val="bg2">
                     <a:lumMod val="50000"/>
@@ -3840,22 +3875,15 @@
               </a:rPr>
             </a:br>
             <a:r>
-              <a:rPr lang="es-MX" sz="3200">
+              <a:rPr lang="es-MX" sz="3200" dirty="0">
                 <a:solidFill>
                   <a:schemeClr val="bg2">
                     <a:lumMod val="50000"/>
                   </a:schemeClr>
                 </a:solidFill>
               </a:rPr>
-              <a:t>Pensamiento Computacional para Ingeniería</a:t>
-            </a:r>
-            <a:endParaRPr lang="es-MX" sz="3200" dirty="0">
-              <a:solidFill>
-                <a:schemeClr val="bg2">
-                  <a:lumMod val="50000"/>
-                </a:schemeClr>
-              </a:solidFill>
-            </a:endParaRPr>
+              <a:t>Pensamiento algorítmico</a:t>
+            </a:r>
           </a:p>
         </p:txBody>
       </p:sp>
@@ -3937,1113 +3965,6 @@
         </p:nvSpPr>
         <p:spPr>
           <a:xfrm>
-            <a:off x="1070992" y="-90264"/>
-            <a:ext cx="7317432" cy="1143000"/>
-          </a:xfrm>
-        </p:spPr>
-        <p:txBody>
-          <a:bodyPr/>
-          <a:lstStyle/>
-          <a:p>
-            <a:pPr algn="ctr" eaLnBrk="1" hangingPunct="1">
-              <a:defRPr/>
-            </a:pPr>
-            <a:r>
-              <a:rPr lang="es-ES_tradnl" b="1" dirty="0">
-                <a:solidFill>
-                  <a:schemeClr val="accent4">
-                    <a:lumMod val="50000"/>
-                  </a:schemeClr>
-                </a:solidFill>
-                <a:effectLst>
-                  <a:outerShdw blurRad="38100" dist="38100" dir="2700000" algn="tl">
-                    <a:srgbClr val="C0C0C0"/>
-                  </a:outerShdw>
-                </a:effectLst>
-                <a:latin typeface="Dom Casual" charset="0"/>
-              </a:rPr>
-              <a:t>Funciones y métodos</a:t>
-            </a:r>
-          </a:p>
-        </p:txBody>
-      </p:sp>
-      <p:graphicFrame>
-        <p:nvGraphicFramePr>
-          <p:cNvPr id="6" name="Tabla 5">
-            <a:extLst>
-              <a:ext uri="{FF2B5EF4-FFF2-40B4-BE49-F238E27FC236}">
-                <a16:creationId xmlns:a16="http://schemas.microsoft.com/office/drawing/2014/main" id="{BE426977-61B5-479E-97A7-3FE465BE2807}"/>
-              </a:ext>
-            </a:extLst>
-          </p:cNvPr>
-          <p:cNvGraphicFramePr>
-            <a:graphicFrameLocks noGrp="1"/>
-          </p:cNvGraphicFramePr>
-          <p:nvPr>
-            <p:extLst>
-              <p:ext uri="{D42A27DB-BD31-4B8C-83A1-F6EECF244321}">
-                <p14:modId xmlns:p14="http://schemas.microsoft.com/office/powerpoint/2010/main" val="3826346643"/>
-              </p:ext>
-            </p:extLst>
-          </p:nvPr>
-        </p:nvGraphicFramePr>
-        <p:xfrm>
-          <a:off x="395536" y="1196752"/>
-          <a:ext cx="8064896" cy="5112567"/>
-        </p:xfrm>
-        <a:graphic>
-          <a:graphicData uri="http://schemas.openxmlformats.org/drawingml/2006/table">
-            <a:tbl>
-              <a:tblPr firstRow="1" firstCol="1" bandRow="1">
-                <a:tableStyleId>{5C22544A-7EE6-4342-B048-85BDC9FD1C3A}</a:tableStyleId>
-              </a:tblPr>
-              <a:tblGrid>
-                <a:gridCol w="2643669">
-                  <a:extLst>
-                    <a:ext uri="{9D8B030D-6E8A-4147-A177-3AD203B41FA5}">
-                      <a16:colId xmlns:a16="http://schemas.microsoft.com/office/drawing/2014/main" val="1876588526"/>
-                    </a:ext>
-                  </a:extLst>
-                </a:gridCol>
-                <a:gridCol w="1460787">
-                  <a:extLst>
-                    <a:ext uri="{9D8B030D-6E8A-4147-A177-3AD203B41FA5}">
-                      <a16:colId xmlns:a16="http://schemas.microsoft.com/office/drawing/2014/main" val="4057113337"/>
-                    </a:ext>
-                  </a:extLst>
-                </a:gridCol>
-                <a:gridCol w="3960440">
-                  <a:extLst>
-                    <a:ext uri="{9D8B030D-6E8A-4147-A177-3AD203B41FA5}">
-                      <a16:colId xmlns:a16="http://schemas.microsoft.com/office/drawing/2014/main" val="829240010"/>
-                    </a:ext>
-                  </a:extLst>
-                </a:gridCol>
-              </a:tblGrid>
-              <a:tr h="259787">
-                <a:tc>
-                  <a:txBody>
-                    <a:bodyPr/>
-                    <a:lstStyle/>
-                    <a:p>
-                      <a:pPr algn="ctr">
-                        <a:lnSpc>
-                          <a:spcPct val="107000"/>
-                        </a:lnSpc>
-                        <a:spcAft>
-                          <a:spcPts val="0"/>
-                        </a:spcAft>
-                      </a:pPr>
-                      <a:r>
-                        <a:rPr lang="es-MX" sz="1600" dirty="0">
-                          <a:effectLst/>
-                          <a:latin typeface="+mn-lt"/>
-                        </a:rPr>
-                        <a:t>Explicación</a:t>
-                      </a:r>
-                      <a:endParaRPr lang="es-MX" sz="1600" dirty="0">
-                        <a:effectLst/>
-                        <a:latin typeface="+mn-lt"/>
-                        <a:ea typeface="Calibri" panose="020F0502020204030204" pitchFamily="34" charset="0"/>
-                        <a:cs typeface="Times New Roman" panose="02020603050405020304" pitchFamily="18" charset="0"/>
-                      </a:endParaRPr>
-                    </a:p>
-                  </a:txBody>
-                  <a:tcPr marL="28008" marR="28008" marT="0" marB="0">
-                    <a:solidFill>
-                      <a:schemeClr val="accent4">
-                        <a:lumMod val="50000"/>
-                      </a:schemeClr>
-                    </a:solidFill>
-                  </a:tcPr>
-                </a:tc>
-                <a:tc>
-                  <a:txBody>
-                    <a:bodyPr/>
-                    <a:lstStyle/>
-                    <a:p>
-                      <a:pPr algn="ctr">
-                        <a:lnSpc>
-                          <a:spcPct val="107000"/>
-                        </a:lnSpc>
-                        <a:spcAft>
-                          <a:spcPts val="0"/>
-                        </a:spcAft>
-                      </a:pPr>
-                      <a:r>
-                        <a:rPr lang="es-MX" sz="1600" dirty="0">
-                          <a:effectLst/>
-                          <a:latin typeface="+mn-lt"/>
-                        </a:rPr>
-                        <a:t>Método</a:t>
-                      </a:r>
-                      <a:endParaRPr lang="es-MX" sz="1600" dirty="0">
-                        <a:effectLst/>
-                        <a:latin typeface="+mn-lt"/>
-                        <a:ea typeface="Calibri" panose="020F0502020204030204" pitchFamily="34" charset="0"/>
-                        <a:cs typeface="Times New Roman" panose="02020603050405020304" pitchFamily="18" charset="0"/>
-                      </a:endParaRPr>
-                    </a:p>
-                  </a:txBody>
-                  <a:tcPr marL="28008" marR="28008" marT="0" marB="0">
-                    <a:solidFill>
-                      <a:schemeClr val="accent4">
-                        <a:lumMod val="50000"/>
-                      </a:schemeClr>
-                    </a:solidFill>
-                  </a:tcPr>
-                </a:tc>
-                <a:tc>
-                  <a:txBody>
-                    <a:bodyPr/>
-                    <a:lstStyle/>
-                    <a:p>
-                      <a:pPr algn="ctr">
-                        <a:lnSpc>
-                          <a:spcPct val="107000"/>
-                        </a:lnSpc>
-                        <a:spcAft>
-                          <a:spcPts val="0"/>
-                        </a:spcAft>
-                      </a:pPr>
-                      <a:r>
-                        <a:rPr lang="es-MX" sz="1600" dirty="0">
-                          <a:effectLst/>
-                          <a:latin typeface="+mn-lt"/>
-                        </a:rPr>
-                        <a:t>Ejemplo</a:t>
-                      </a:r>
-                      <a:endParaRPr lang="es-MX" sz="1600" dirty="0">
-                        <a:effectLst/>
-                        <a:latin typeface="+mn-lt"/>
-                        <a:ea typeface="Calibri" panose="020F0502020204030204" pitchFamily="34" charset="0"/>
-                        <a:cs typeface="Times New Roman" panose="02020603050405020304" pitchFamily="18" charset="0"/>
-                      </a:endParaRPr>
-                    </a:p>
-                  </a:txBody>
-                  <a:tcPr marL="28008" marR="28008" marT="0" marB="0">
-                    <a:solidFill>
-                      <a:schemeClr val="accent4">
-                        <a:lumMod val="50000"/>
-                      </a:schemeClr>
-                    </a:solidFill>
-                  </a:tcPr>
-                </a:tc>
-                <a:extLst>
-                  <a:ext uri="{0D108BD9-81ED-4DB2-BD59-A6C34878D82A}">
-                    <a16:rowId xmlns:a16="http://schemas.microsoft.com/office/drawing/2014/main" val="180739552"/>
-                  </a:ext>
-                </a:extLst>
-              </a:tr>
-              <a:tr h="1821488">
-                <a:tc>
-                  <a:txBody>
-                    <a:bodyPr/>
-                    <a:lstStyle/>
-                    <a:p>
-                      <a:pPr marL="0" algn="ctr" defTabSz="914400" rtl="0" eaLnBrk="1" latinLnBrk="0" hangingPunct="1">
-                        <a:lnSpc>
-                          <a:spcPct val="107000"/>
-                        </a:lnSpc>
-                        <a:spcAft>
-                          <a:spcPts val="0"/>
-                        </a:spcAft>
-                      </a:pPr>
-                      <a:r>
-                        <a:rPr lang="es-MX" sz="1600" b="0" kern="1200" dirty="0">
-                          <a:solidFill>
-                            <a:schemeClr val="lt1"/>
-                          </a:solidFill>
-                          <a:effectLst/>
-                          <a:latin typeface="+mn-lt"/>
-                          <a:ea typeface="+mn-ea"/>
-                          <a:cs typeface="+mn-cs"/>
-                        </a:rPr>
-                        <a:t>Regresa una nueva cadena con el contenido de la cadena original con todos los caracteres en mayúscula.</a:t>
-                      </a:r>
-                    </a:p>
-                  </a:txBody>
-                  <a:tcPr marL="68580" marR="68580" marT="0" marB="0" anchor="ctr" anchorCtr="1">
-                    <a:solidFill>
-                      <a:schemeClr val="accent4">
-                        <a:lumMod val="50000"/>
-                      </a:schemeClr>
-                    </a:solidFill>
-                  </a:tcPr>
-                </a:tc>
-                <a:tc>
-                  <a:txBody>
-                    <a:bodyPr/>
-                    <a:lstStyle/>
-                    <a:p>
-                      <a:pPr>
-                        <a:lnSpc>
-                          <a:spcPct val="107000"/>
-                        </a:lnSpc>
-                        <a:spcAft>
-                          <a:spcPts val="0"/>
-                        </a:spcAft>
-                      </a:pPr>
-                      <a:r>
-                        <a:rPr lang="es-MX" sz="1800" b="1" kern="1200" dirty="0" err="1">
-                          <a:solidFill>
-                            <a:schemeClr val="dk1"/>
-                          </a:solidFill>
-                          <a:effectLst/>
-                          <a:latin typeface="+mn-lt"/>
-                          <a:ea typeface="+mn-ea"/>
-                          <a:cs typeface="+mn-cs"/>
-                        </a:rPr>
-                        <a:t>upper</a:t>
-                      </a:r>
-                      <a:r>
-                        <a:rPr lang="es-MX" sz="1800" b="1" kern="1200" dirty="0">
-                          <a:solidFill>
-                            <a:schemeClr val="dk1"/>
-                          </a:solidFill>
-                          <a:effectLst/>
-                          <a:latin typeface="+mn-lt"/>
-                          <a:ea typeface="+mn-ea"/>
-                          <a:cs typeface="+mn-cs"/>
-                        </a:rPr>
-                        <a:t>()</a:t>
-                      </a:r>
-                    </a:p>
-                  </a:txBody>
-                  <a:tcPr marL="68580" marR="68580" marT="0" marB="0" anchor="ctr" anchorCtr="1">
-                    <a:solidFill>
-                      <a:schemeClr val="accent3">
-                        <a:lumMod val="20000"/>
-                        <a:lumOff val="80000"/>
-                      </a:schemeClr>
-                    </a:solidFill>
-                  </a:tcPr>
-                </a:tc>
-                <a:tc>
-                  <a:txBody>
-                    <a:bodyPr/>
-                    <a:lstStyle/>
-                    <a:p>
-                      <a:pPr marL="0" marR="0" lvl="0" indent="0" algn="l" defTabSz="914400" rtl="0" eaLnBrk="1" fontAlgn="auto" latinLnBrk="0" hangingPunct="1">
-                        <a:lnSpc>
-                          <a:spcPct val="107000"/>
-                        </a:lnSpc>
-                        <a:spcBef>
-                          <a:spcPts val="0"/>
-                        </a:spcBef>
-                        <a:spcAft>
-                          <a:spcPts val="0"/>
-                        </a:spcAft>
-                        <a:buClrTx/>
-                        <a:buSzTx/>
-                        <a:buFontTx/>
-                        <a:buNone/>
-                        <a:tabLst/>
-                        <a:defRPr/>
-                      </a:pPr>
-                      <a:r>
-                        <a:rPr lang="es-MX" sz="1800" b="1" dirty="0">
-                          <a:effectLst/>
-                          <a:latin typeface="+mn-lt"/>
-                        </a:rPr>
-                        <a:t>cadena = "Hola Mundo"</a:t>
-                      </a:r>
-                    </a:p>
-                    <a:p>
-                      <a:pPr>
-                        <a:lnSpc>
-                          <a:spcPct val="107000"/>
-                        </a:lnSpc>
-                        <a:spcAft>
-                          <a:spcPts val="0"/>
-                        </a:spcAft>
-                      </a:pPr>
-                      <a:r>
-                        <a:rPr lang="es-MX" sz="1800" b="1" kern="1200" dirty="0">
-                          <a:solidFill>
-                            <a:schemeClr val="dk1"/>
-                          </a:solidFill>
-                          <a:effectLst/>
-                          <a:latin typeface="+mn-lt"/>
-                          <a:ea typeface="+mn-ea"/>
-                          <a:cs typeface="+mn-cs"/>
-                        </a:rPr>
-                        <a:t>cadena2=</a:t>
-                      </a:r>
-                      <a:r>
-                        <a:rPr lang="es-MX" sz="1800" b="1" kern="1200" dirty="0" err="1">
-                          <a:solidFill>
-                            <a:schemeClr val="dk1"/>
-                          </a:solidFill>
-                          <a:effectLst/>
-                          <a:latin typeface="+mn-lt"/>
-                          <a:ea typeface="+mn-ea"/>
-                          <a:cs typeface="+mn-cs"/>
-                        </a:rPr>
-                        <a:t>cadena.upper</a:t>
-                      </a:r>
-                      <a:r>
-                        <a:rPr lang="es-MX" sz="1800" b="1" kern="1200" dirty="0">
-                          <a:solidFill>
-                            <a:schemeClr val="dk1"/>
-                          </a:solidFill>
-                          <a:effectLst/>
-                          <a:latin typeface="+mn-lt"/>
-                          <a:ea typeface="+mn-ea"/>
-                          <a:cs typeface="+mn-cs"/>
-                        </a:rPr>
-                        <a:t>()</a:t>
-                      </a:r>
-                    </a:p>
-                    <a:p>
-                      <a:pPr>
-                        <a:lnSpc>
-                          <a:spcPct val="107000"/>
-                        </a:lnSpc>
-                        <a:spcAft>
-                          <a:spcPts val="0"/>
-                        </a:spcAft>
-                      </a:pPr>
-                      <a:r>
-                        <a:rPr lang="es-MX" sz="1800" b="1" kern="1200" dirty="0" err="1">
-                          <a:solidFill>
-                            <a:schemeClr val="dk1"/>
-                          </a:solidFill>
-                          <a:effectLst/>
-                          <a:latin typeface="+mn-lt"/>
-                          <a:ea typeface="+mn-ea"/>
-                          <a:cs typeface="+mn-cs"/>
-                        </a:rPr>
-                        <a:t>print</a:t>
-                      </a:r>
-                      <a:r>
-                        <a:rPr lang="es-MX" sz="1800" b="1" kern="1200" dirty="0">
-                          <a:solidFill>
-                            <a:schemeClr val="dk1"/>
-                          </a:solidFill>
-                          <a:effectLst/>
-                          <a:latin typeface="+mn-lt"/>
-                          <a:ea typeface="+mn-ea"/>
-                          <a:cs typeface="+mn-cs"/>
-                        </a:rPr>
-                        <a:t>(cadena)</a:t>
-                      </a:r>
-                    </a:p>
-                    <a:p>
-                      <a:pPr>
-                        <a:lnSpc>
-                          <a:spcPct val="107000"/>
-                        </a:lnSpc>
-                        <a:spcAft>
-                          <a:spcPts val="0"/>
-                        </a:spcAft>
-                      </a:pPr>
-                      <a:r>
-                        <a:rPr lang="es-MX" sz="1800" b="1" kern="1200" dirty="0" err="1">
-                          <a:solidFill>
-                            <a:schemeClr val="dk1"/>
-                          </a:solidFill>
-                          <a:effectLst/>
-                          <a:latin typeface="+mn-lt"/>
-                          <a:ea typeface="+mn-ea"/>
-                          <a:cs typeface="+mn-cs"/>
-                        </a:rPr>
-                        <a:t>print</a:t>
-                      </a:r>
-                      <a:r>
-                        <a:rPr lang="es-MX" sz="1800" b="1" kern="1200" dirty="0">
-                          <a:solidFill>
-                            <a:schemeClr val="dk1"/>
-                          </a:solidFill>
-                          <a:effectLst/>
-                          <a:latin typeface="+mn-lt"/>
-                          <a:ea typeface="+mn-ea"/>
-                          <a:cs typeface="+mn-cs"/>
-                        </a:rPr>
-                        <a:t>(cadena2)</a:t>
-                      </a:r>
-                    </a:p>
-                    <a:p>
-                      <a:pPr>
-                        <a:lnSpc>
-                          <a:spcPct val="107000"/>
-                        </a:lnSpc>
-                        <a:spcAft>
-                          <a:spcPts val="0"/>
-                        </a:spcAft>
-                      </a:pPr>
-                      <a:r>
-                        <a:rPr lang="es-MX" sz="1800" b="0" kern="1200" dirty="0">
-                          <a:solidFill>
-                            <a:schemeClr val="dk1"/>
-                          </a:solidFill>
-                          <a:effectLst/>
-                          <a:latin typeface="+mn-lt"/>
-                          <a:ea typeface="+mn-ea"/>
-                          <a:cs typeface="+mn-cs"/>
-                        </a:rPr>
-                        <a:t>Hola Mundo</a:t>
-                      </a:r>
-                    </a:p>
-                    <a:p>
-                      <a:pPr>
-                        <a:lnSpc>
-                          <a:spcPct val="107000"/>
-                        </a:lnSpc>
-                        <a:spcAft>
-                          <a:spcPts val="0"/>
-                        </a:spcAft>
-                      </a:pPr>
-                      <a:r>
-                        <a:rPr lang="es-MX" sz="1800" b="0" kern="1200" dirty="0">
-                          <a:solidFill>
-                            <a:schemeClr val="dk1"/>
-                          </a:solidFill>
-                          <a:effectLst/>
-                          <a:latin typeface="+mn-lt"/>
-                          <a:ea typeface="+mn-ea"/>
-                          <a:cs typeface="+mn-cs"/>
-                        </a:rPr>
-                        <a:t>HOLA MUNDO</a:t>
-                      </a:r>
-                      <a:endParaRPr lang="es-MX" sz="1800" b="1" kern="1200" dirty="0">
-                        <a:solidFill>
-                          <a:schemeClr val="dk1"/>
-                        </a:solidFill>
-                        <a:effectLst/>
-                        <a:latin typeface="+mn-lt"/>
-                        <a:ea typeface="+mn-ea"/>
-                        <a:cs typeface="+mn-cs"/>
-                      </a:endParaRPr>
-                    </a:p>
-                  </a:txBody>
-                  <a:tcPr marL="68580" marR="68580" marT="0" marB="0" anchor="ctr" anchorCtr="1">
-                    <a:solidFill>
-                      <a:schemeClr val="accent3">
-                        <a:lumMod val="20000"/>
-                        <a:lumOff val="80000"/>
-                      </a:schemeClr>
-                    </a:solidFill>
-                  </a:tcPr>
-                </a:tc>
-                <a:extLst>
-                  <a:ext uri="{0D108BD9-81ED-4DB2-BD59-A6C34878D82A}">
-                    <a16:rowId xmlns:a16="http://schemas.microsoft.com/office/drawing/2014/main" val="18612594"/>
-                  </a:ext>
-                </a:extLst>
-              </a:tr>
-              <a:tr h="1515646">
-                <a:tc>
-                  <a:txBody>
-                    <a:bodyPr/>
-                    <a:lstStyle/>
-                    <a:p>
-                      <a:pPr marL="0" algn="ctr" defTabSz="914400" rtl="0" eaLnBrk="1" latinLnBrk="0" hangingPunct="1">
-                        <a:lnSpc>
-                          <a:spcPct val="107000"/>
-                        </a:lnSpc>
-                        <a:spcAft>
-                          <a:spcPts val="0"/>
-                        </a:spcAft>
-                      </a:pPr>
-                      <a:r>
-                        <a:rPr lang="es-MX" sz="1600" b="0" kern="1200" dirty="0">
-                          <a:solidFill>
-                            <a:schemeClr val="lt1"/>
-                          </a:solidFill>
-                          <a:effectLst/>
-                          <a:latin typeface="+mn-lt"/>
-                          <a:ea typeface="+mn-ea"/>
-                          <a:cs typeface="+mn-cs"/>
-                        </a:rPr>
-                        <a:t>Regresa una nueva cadena con el contenido de la cadena original con todos los caracteres en minúscula.</a:t>
-                      </a:r>
-                    </a:p>
-                  </a:txBody>
-                  <a:tcPr marL="68580" marR="68580" marT="0" marB="0" anchor="ctr" anchorCtr="1">
-                    <a:solidFill>
-                      <a:schemeClr val="accent4">
-                        <a:lumMod val="50000"/>
-                      </a:schemeClr>
-                    </a:solidFill>
-                  </a:tcPr>
-                </a:tc>
-                <a:tc>
-                  <a:txBody>
-                    <a:bodyPr/>
-                    <a:lstStyle/>
-                    <a:p>
-                      <a:pPr>
-                        <a:lnSpc>
-                          <a:spcPct val="107000"/>
-                        </a:lnSpc>
-                        <a:spcAft>
-                          <a:spcPts val="0"/>
-                        </a:spcAft>
-                      </a:pPr>
-                      <a:r>
-                        <a:rPr lang="es-MX" sz="1800" b="1" kern="1200" dirty="0" err="1">
-                          <a:solidFill>
-                            <a:schemeClr val="dk1"/>
-                          </a:solidFill>
-                          <a:effectLst/>
-                          <a:latin typeface="+mn-lt"/>
-                          <a:ea typeface="+mn-ea"/>
-                          <a:cs typeface="+mn-cs"/>
-                        </a:rPr>
-                        <a:t>lower</a:t>
-                      </a:r>
-                      <a:r>
-                        <a:rPr lang="es-MX" sz="1800" b="1" kern="1200" dirty="0">
-                          <a:solidFill>
-                            <a:schemeClr val="dk1"/>
-                          </a:solidFill>
-                          <a:effectLst/>
-                          <a:latin typeface="+mn-lt"/>
-                          <a:ea typeface="+mn-ea"/>
-                          <a:cs typeface="+mn-cs"/>
-                        </a:rPr>
-                        <a:t>()</a:t>
-                      </a:r>
-                    </a:p>
-                  </a:txBody>
-                  <a:tcPr marL="68580" marR="68580" marT="0" marB="0" anchor="ctr" anchorCtr="1">
-                    <a:solidFill>
-                      <a:schemeClr val="accent3">
-                        <a:lumMod val="20000"/>
-                        <a:lumOff val="80000"/>
-                      </a:schemeClr>
-                    </a:solidFill>
-                  </a:tcPr>
-                </a:tc>
-                <a:tc>
-                  <a:txBody>
-                    <a:bodyPr/>
-                    <a:lstStyle/>
-                    <a:p>
-                      <a:pPr>
-                        <a:lnSpc>
-                          <a:spcPct val="107000"/>
-                        </a:lnSpc>
-                        <a:spcAft>
-                          <a:spcPts val="0"/>
-                        </a:spcAft>
-                      </a:pPr>
-                      <a:r>
-                        <a:rPr lang="es-MX" sz="1800" b="1" kern="1200" dirty="0">
-                          <a:solidFill>
-                            <a:schemeClr val="dk1"/>
-                          </a:solidFill>
-                          <a:effectLst/>
-                          <a:latin typeface="+mn-lt"/>
-                          <a:ea typeface="+mn-ea"/>
-                          <a:cs typeface="+mn-cs"/>
-                        </a:rPr>
-                        <a:t>cadena2=</a:t>
-                      </a:r>
-                      <a:r>
-                        <a:rPr lang="es-MX" sz="1800" b="1" kern="1200" dirty="0" err="1">
-                          <a:solidFill>
-                            <a:schemeClr val="dk1"/>
-                          </a:solidFill>
-                          <a:effectLst/>
-                          <a:latin typeface="+mn-lt"/>
-                          <a:ea typeface="+mn-ea"/>
-                          <a:cs typeface="+mn-cs"/>
-                        </a:rPr>
-                        <a:t>cadena.lower</a:t>
-                      </a:r>
-                      <a:r>
-                        <a:rPr lang="es-MX" sz="1800" b="1" kern="1200" dirty="0">
-                          <a:solidFill>
-                            <a:schemeClr val="dk1"/>
-                          </a:solidFill>
-                          <a:effectLst/>
-                          <a:latin typeface="+mn-lt"/>
-                          <a:ea typeface="+mn-ea"/>
-                          <a:cs typeface="+mn-cs"/>
-                        </a:rPr>
-                        <a:t>()</a:t>
-                      </a:r>
-                    </a:p>
-                    <a:p>
-                      <a:pPr>
-                        <a:lnSpc>
-                          <a:spcPct val="107000"/>
-                        </a:lnSpc>
-                        <a:spcAft>
-                          <a:spcPts val="0"/>
-                        </a:spcAft>
-                      </a:pPr>
-                      <a:r>
-                        <a:rPr lang="es-MX" sz="1800" b="1" kern="1200" dirty="0" err="1">
-                          <a:solidFill>
-                            <a:schemeClr val="dk1"/>
-                          </a:solidFill>
-                          <a:effectLst/>
-                          <a:latin typeface="+mn-lt"/>
-                          <a:ea typeface="+mn-ea"/>
-                          <a:cs typeface="+mn-cs"/>
-                        </a:rPr>
-                        <a:t>print</a:t>
-                      </a:r>
-                      <a:r>
-                        <a:rPr lang="es-MX" sz="1800" b="1" kern="1200" dirty="0">
-                          <a:solidFill>
-                            <a:schemeClr val="dk1"/>
-                          </a:solidFill>
-                          <a:effectLst/>
-                          <a:latin typeface="+mn-lt"/>
-                          <a:ea typeface="+mn-ea"/>
-                          <a:cs typeface="+mn-cs"/>
-                        </a:rPr>
-                        <a:t>(cadena)</a:t>
-                      </a:r>
-                    </a:p>
-                    <a:p>
-                      <a:pPr>
-                        <a:lnSpc>
-                          <a:spcPct val="107000"/>
-                        </a:lnSpc>
-                        <a:spcAft>
-                          <a:spcPts val="0"/>
-                        </a:spcAft>
-                      </a:pPr>
-                      <a:r>
-                        <a:rPr lang="es-MX" sz="1800" b="1" kern="1200" dirty="0" err="1">
-                          <a:solidFill>
-                            <a:schemeClr val="dk1"/>
-                          </a:solidFill>
-                          <a:effectLst/>
-                          <a:latin typeface="+mn-lt"/>
-                          <a:ea typeface="+mn-ea"/>
-                          <a:cs typeface="+mn-cs"/>
-                        </a:rPr>
-                        <a:t>print</a:t>
-                      </a:r>
-                      <a:r>
-                        <a:rPr lang="es-MX" sz="1800" b="1" kern="1200" dirty="0">
-                          <a:solidFill>
-                            <a:schemeClr val="dk1"/>
-                          </a:solidFill>
-                          <a:effectLst/>
-                          <a:latin typeface="+mn-lt"/>
-                          <a:ea typeface="+mn-ea"/>
-                          <a:cs typeface="+mn-cs"/>
-                        </a:rPr>
-                        <a:t>(cadena2)</a:t>
-                      </a:r>
-                    </a:p>
-                    <a:p>
-                      <a:pPr>
-                        <a:lnSpc>
-                          <a:spcPct val="107000"/>
-                        </a:lnSpc>
-                        <a:spcAft>
-                          <a:spcPts val="0"/>
-                        </a:spcAft>
-                      </a:pPr>
-                      <a:r>
-                        <a:rPr lang="es-MX" sz="1800" b="0" kern="1200" dirty="0">
-                          <a:solidFill>
-                            <a:schemeClr val="dk1"/>
-                          </a:solidFill>
-                          <a:effectLst/>
-                          <a:latin typeface="+mn-lt"/>
-                          <a:ea typeface="+mn-ea"/>
-                          <a:cs typeface="+mn-cs"/>
-                        </a:rPr>
-                        <a:t>Hola Mundo</a:t>
-                      </a:r>
-                    </a:p>
-                    <a:p>
-                      <a:pPr>
-                        <a:lnSpc>
-                          <a:spcPct val="107000"/>
-                        </a:lnSpc>
-                        <a:spcAft>
-                          <a:spcPts val="0"/>
-                        </a:spcAft>
-                      </a:pPr>
-                      <a:r>
-                        <a:rPr lang="es-MX" sz="1800" b="0" kern="1200" dirty="0">
-                          <a:solidFill>
-                            <a:schemeClr val="dk1"/>
-                          </a:solidFill>
-                          <a:effectLst/>
-                          <a:latin typeface="+mn-lt"/>
-                          <a:ea typeface="+mn-ea"/>
-                          <a:cs typeface="+mn-cs"/>
-                        </a:rPr>
-                        <a:t>hola mundo</a:t>
-                      </a:r>
-                      <a:endParaRPr lang="es-MX" sz="1800" b="1" kern="1200" dirty="0">
-                        <a:solidFill>
-                          <a:schemeClr val="dk1"/>
-                        </a:solidFill>
-                        <a:effectLst/>
-                        <a:latin typeface="+mn-lt"/>
-                        <a:ea typeface="+mn-ea"/>
-                        <a:cs typeface="+mn-cs"/>
-                      </a:endParaRPr>
-                    </a:p>
-                  </a:txBody>
-                  <a:tcPr marL="68580" marR="68580" marT="0" marB="0" anchor="ctr" anchorCtr="1">
-                    <a:solidFill>
-                      <a:schemeClr val="accent3">
-                        <a:lumMod val="20000"/>
-                        <a:lumOff val="80000"/>
-                      </a:schemeClr>
-                    </a:solidFill>
-                  </a:tcPr>
-                </a:tc>
-                <a:extLst>
-                  <a:ext uri="{0D108BD9-81ED-4DB2-BD59-A6C34878D82A}">
-                    <a16:rowId xmlns:a16="http://schemas.microsoft.com/office/drawing/2014/main" val="3136739256"/>
-                  </a:ext>
-                </a:extLst>
-              </a:tr>
-              <a:tr h="1515646">
-                <a:tc>
-                  <a:txBody>
-                    <a:bodyPr/>
-                    <a:lstStyle/>
-                    <a:p>
-                      <a:pPr algn="ctr">
-                        <a:lnSpc>
-                          <a:spcPct val="107000"/>
-                        </a:lnSpc>
-                        <a:spcAft>
-                          <a:spcPts val="0"/>
-                        </a:spcAft>
-                      </a:pPr>
-                      <a:r>
-                        <a:rPr lang="es-MX" sz="1600" b="0" kern="1200" dirty="0">
-                          <a:solidFill>
-                            <a:schemeClr val="lt1"/>
-                          </a:solidFill>
-                          <a:effectLst/>
-                          <a:latin typeface="+mn-lt"/>
-                          <a:ea typeface="+mn-ea"/>
-                          <a:cs typeface="+mn-cs"/>
-                        </a:rPr>
-                        <a:t>Regresa una nueva cadena con el contenido de la cadena original con la primera letra en mayúscula</a:t>
-                      </a:r>
-                    </a:p>
-                  </a:txBody>
-                  <a:tcPr marL="68580" marR="68580" marT="0" marB="0" anchor="ctr">
-                    <a:solidFill>
-                      <a:schemeClr val="accent4">
-                        <a:lumMod val="50000"/>
-                      </a:schemeClr>
-                    </a:solidFill>
-                  </a:tcPr>
-                </a:tc>
-                <a:tc>
-                  <a:txBody>
-                    <a:bodyPr/>
-                    <a:lstStyle/>
-                    <a:p>
-                      <a:pPr algn="ctr">
-                        <a:lnSpc>
-                          <a:spcPct val="107000"/>
-                        </a:lnSpc>
-                        <a:spcAft>
-                          <a:spcPts val="0"/>
-                        </a:spcAft>
-                      </a:pPr>
-                      <a:r>
-                        <a:rPr lang="es-MX" sz="1800" b="1" kern="1200" dirty="0" err="1">
-                          <a:solidFill>
-                            <a:schemeClr val="dk1"/>
-                          </a:solidFill>
-                          <a:effectLst/>
-                          <a:latin typeface="+mn-lt"/>
-                          <a:ea typeface="+mn-ea"/>
-                          <a:cs typeface="+mn-cs"/>
-                        </a:rPr>
-                        <a:t>capitalize</a:t>
-                      </a:r>
-                      <a:r>
-                        <a:rPr lang="es-MX" sz="1800" b="1" kern="1200" dirty="0">
-                          <a:solidFill>
-                            <a:schemeClr val="dk1"/>
-                          </a:solidFill>
-                          <a:effectLst/>
-                          <a:latin typeface="+mn-lt"/>
-                          <a:ea typeface="+mn-ea"/>
-                          <a:cs typeface="+mn-cs"/>
-                        </a:rPr>
-                        <a:t>()</a:t>
-                      </a:r>
-                    </a:p>
-                  </a:txBody>
-                  <a:tcPr marL="68580" marR="68580" marT="0" marB="0" anchor="ctr">
-                    <a:solidFill>
-                      <a:schemeClr val="accent3">
-                        <a:lumMod val="20000"/>
-                        <a:lumOff val="80000"/>
-                      </a:schemeClr>
-                    </a:solidFill>
-                  </a:tcPr>
-                </a:tc>
-                <a:tc>
-                  <a:txBody>
-                    <a:bodyPr/>
-                    <a:lstStyle/>
-                    <a:p>
-                      <a:pPr algn="ctr">
-                        <a:lnSpc>
-                          <a:spcPct val="107000"/>
-                        </a:lnSpc>
-                        <a:spcAft>
-                          <a:spcPts val="0"/>
-                        </a:spcAft>
-                      </a:pPr>
-                      <a:r>
-                        <a:rPr lang="es-MX" sz="1800" b="1" kern="1200" dirty="0">
-                          <a:solidFill>
-                            <a:schemeClr val="dk1"/>
-                          </a:solidFill>
-                          <a:effectLst/>
-                          <a:latin typeface="+mn-lt"/>
-                          <a:ea typeface="+mn-ea"/>
-                          <a:cs typeface="+mn-cs"/>
-                        </a:rPr>
-                        <a:t>         cadena3=cadena2.capitalize()</a:t>
-                      </a:r>
-                    </a:p>
-                    <a:p>
-                      <a:pPr>
-                        <a:lnSpc>
-                          <a:spcPct val="107000"/>
-                        </a:lnSpc>
-                        <a:spcAft>
-                          <a:spcPts val="0"/>
-                        </a:spcAft>
-                      </a:pPr>
-                      <a:r>
-                        <a:rPr lang="es-MX" sz="1800" b="1" kern="1200" dirty="0">
-                          <a:solidFill>
-                            <a:schemeClr val="dk1"/>
-                          </a:solidFill>
-                          <a:effectLst/>
-                          <a:latin typeface="+mn-lt"/>
-                          <a:ea typeface="+mn-ea"/>
-                          <a:cs typeface="+mn-cs"/>
-                        </a:rPr>
-                        <a:t>              </a:t>
-                      </a:r>
-                      <a:r>
-                        <a:rPr lang="es-MX" sz="1800" b="1" kern="1200" dirty="0" err="1">
-                          <a:solidFill>
-                            <a:schemeClr val="dk1"/>
-                          </a:solidFill>
-                          <a:effectLst/>
-                          <a:latin typeface="+mn-lt"/>
-                          <a:ea typeface="+mn-ea"/>
-                          <a:cs typeface="+mn-cs"/>
-                        </a:rPr>
-                        <a:t>print</a:t>
-                      </a:r>
-                      <a:r>
-                        <a:rPr lang="es-MX" sz="1800" b="1" kern="1200" dirty="0">
-                          <a:solidFill>
-                            <a:schemeClr val="dk1"/>
-                          </a:solidFill>
-                          <a:effectLst/>
-                          <a:latin typeface="+mn-lt"/>
-                          <a:ea typeface="+mn-ea"/>
-                          <a:cs typeface="+mn-cs"/>
-                        </a:rPr>
-                        <a:t>(cadena2)</a:t>
-                      </a:r>
-                    </a:p>
-                    <a:p>
-                      <a:pPr>
-                        <a:lnSpc>
-                          <a:spcPct val="107000"/>
-                        </a:lnSpc>
-                        <a:spcAft>
-                          <a:spcPts val="0"/>
-                        </a:spcAft>
-                      </a:pPr>
-                      <a:r>
-                        <a:rPr lang="es-MX" sz="1800" b="1" kern="1200" dirty="0">
-                          <a:solidFill>
-                            <a:schemeClr val="dk1"/>
-                          </a:solidFill>
-                          <a:effectLst/>
-                          <a:latin typeface="+mn-lt"/>
-                          <a:ea typeface="+mn-ea"/>
-                          <a:cs typeface="+mn-cs"/>
-                        </a:rPr>
-                        <a:t>              </a:t>
-                      </a:r>
-                      <a:r>
-                        <a:rPr lang="es-MX" sz="1800" b="1" kern="1200" dirty="0" err="1">
-                          <a:solidFill>
-                            <a:schemeClr val="dk1"/>
-                          </a:solidFill>
-                          <a:effectLst/>
-                          <a:latin typeface="+mn-lt"/>
-                          <a:ea typeface="+mn-ea"/>
-                          <a:cs typeface="+mn-cs"/>
-                        </a:rPr>
-                        <a:t>print</a:t>
-                      </a:r>
-                      <a:r>
-                        <a:rPr lang="es-MX" sz="1800" b="1" kern="1200" dirty="0">
-                          <a:solidFill>
-                            <a:schemeClr val="dk1"/>
-                          </a:solidFill>
-                          <a:effectLst/>
-                          <a:latin typeface="+mn-lt"/>
-                          <a:ea typeface="+mn-ea"/>
-                          <a:cs typeface="+mn-cs"/>
-                        </a:rPr>
-                        <a:t>(cadena3)</a:t>
-                      </a:r>
-                    </a:p>
-                    <a:p>
-                      <a:pPr>
-                        <a:lnSpc>
-                          <a:spcPct val="107000"/>
-                        </a:lnSpc>
-                        <a:spcAft>
-                          <a:spcPts val="0"/>
-                        </a:spcAft>
-                      </a:pPr>
-                      <a:r>
-                        <a:rPr lang="es-MX" sz="1800" b="0" kern="1200" dirty="0">
-                          <a:solidFill>
-                            <a:schemeClr val="dk1"/>
-                          </a:solidFill>
-                          <a:effectLst/>
-                          <a:latin typeface="+mn-lt"/>
-                          <a:ea typeface="+mn-ea"/>
-                          <a:cs typeface="+mn-cs"/>
-                        </a:rPr>
-                        <a:t>              hola mundo</a:t>
-                      </a:r>
-                    </a:p>
-                    <a:p>
-                      <a:pPr>
-                        <a:lnSpc>
-                          <a:spcPct val="107000"/>
-                        </a:lnSpc>
-                        <a:spcAft>
-                          <a:spcPts val="0"/>
-                        </a:spcAft>
-                      </a:pPr>
-                      <a:r>
-                        <a:rPr lang="es-MX" sz="1800" b="0" kern="1200" dirty="0">
-                          <a:solidFill>
-                            <a:schemeClr val="dk1"/>
-                          </a:solidFill>
-                          <a:effectLst/>
-                          <a:latin typeface="+mn-lt"/>
-                          <a:ea typeface="+mn-ea"/>
-                          <a:cs typeface="+mn-cs"/>
-                        </a:rPr>
-                        <a:t>              </a:t>
-                      </a:r>
-                      <a:r>
-                        <a:rPr lang="es-MX" sz="1800" b="1" kern="1200" dirty="0">
-                          <a:solidFill>
-                            <a:schemeClr val="dk1"/>
-                          </a:solidFill>
-                          <a:effectLst/>
-                          <a:latin typeface="+mn-lt"/>
-                          <a:ea typeface="+mn-ea"/>
-                          <a:cs typeface="+mn-cs"/>
-                        </a:rPr>
-                        <a:t>H</a:t>
-                      </a:r>
-                      <a:r>
-                        <a:rPr lang="es-MX" sz="1800" b="0" kern="1200" dirty="0">
-                          <a:solidFill>
-                            <a:schemeClr val="dk1"/>
-                          </a:solidFill>
-                          <a:effectLst/>
-                          <a:latin typeface="+mn-lt"/>
-                          <a:ea typeface="+mn-ea"/>
-                          <a:cs typeface="+mn-cs"/>
-                        </a:rPr>
-                        <a:t>ola mundo</a:t>
-                      </a:r>
-                      <a:endParaRPr lang="es-MX" sz="1800" b="1" kern="1200" dirty="0">
-                        <a:solidFill>
-                          <a:schemeClr val="dk1"/>
-                        </a:solidFill>
-                        <a:effectLst/>
-                        <a:latin typeface="+mn-lt"/>
-                        <a:ea typeface="+mn-ea"/>
-                        <a:cs typeface="+mn-cs"/>
-                      </a:endParaRPr>
-                    </a:p>
-                  </a:txBody>
-                  <a:tcPr marL="68580" marR="68580" marT="0" marB="0" anchor="ctr">
-                    <a:solidFill>
-                      <a:schemeClr val="accent3">
-                        <a:lumMod val="20000"/>
-                        <a:lumOff val="80000"/>
-                      </a:schemeClr>
-                    </a:solidFill>
-                  </a:tcPr>
-                </a:tc>
-                <a:extLst>
-                  <a:ext uri="{0D108BD9-81ED-4DB2-BD59-A6C34878D82A}">
-                    <a16:rowId xmlns:a16="http://schemas.microsoft.com/office/drawing/2014/main" val="3486814094"/>
-                  </a:ext>
-                </a:extLst>
-              </a:tr>
-            </a:tbl>
-          </a:graphicData>
-        </a:graphic>
-      </p:graphicFrame>
-    </p:spTree>
-    <p:extLst>
-      <p:ext uri="{BB962C8B-B14F-4D97-AF65-F5344CB8AC3E}">
-        <p14:creationId xmlns:p14="http://schemas.microsoft.com/office/powerpoint/2010/main" val="3701752175"/>
-      </p:ext>
-    </p:extLst>
-  </p:cSld>
-  <p:clrMapOvr>
-    <a:masterClrMapping/>
-  </p:clrMapOvr>
-</p:sld>
-</file>
-
-<file path=ppt/slides/slide11.xml><?xml version="1.0" encoding="utf-8"?>
-<p:sld xmlns:a="http://schemas.openxmlformats.org/drawingml/2006/main" xmlns:r="http://schemas.openxmlformats.org/officeDocument/2006/relationships" xmlns:p="http://schemas.openxmlformats.org/presentationml/2006/main">
-  <p:cSld>
-    <p:spTree>
-      <p:nvGrpSpPr>
-        <p:cNvPr id="1" name=""/>
-        <p:cNvGrpSpPr/>
-        <p:nvPr/>
-      </p:nvGrpSpPr>
-      <p:grpSpPr>
-        <a:xfrm>
-          <a:off x="0" y="0"/>
-          <a:ext cx="0" cy="0"/>
-          <a:chOff x="0" y="0"/>
-          <a:chExt cx="0" cy="0"/>
-        </a:xfrm>
-      </p:grpSpPr>
-      <p:sp>
-        <p:nvSpPr>
-          <p:cNvPr id="470018" name="Rectangle 2"/>
-          <p:cNvSpPr>
-            <a:spLocks noGrp="1" noChangeArrowheads="1"/>
-          </p:cNvSpPr>
-          <p:nvPr>
-            <p:ph type="title"/>
-          </p:nvPr>
-        </p:nvSpPr>
-        <p:spPr>
-          <a:xfrm>
             <a:off x="913284" y="25052"/>
             <a:ext cx="7317432" cy="1143000"/>
           </a:xfrm>
@@ -6082,7 +5003,7 @@
 </p:sld>
 </file>
 
-<file path=ppt/slides/slide12.xml><?xml version="1.0" encoding="utf-8"?>
+<file path=ppt/slides/slide11.xml><?xml version="1.0" encoding="utf-8"?>
 <p:sld xmlns:a="http://schemas.openxmlformats.org/drawingml/2006/main" xmlns:r="http://schemas.openxmlformats.org/officeDocument/2006/relationships" xmlns:p="http://schemas.openxmlformats.org/presentationml/2006/main">
   <p:cSld>
     <p:spTree>
@@ -6961,7 +5882,7 @@
 </p:sld>
 </file>
 
-<file path=ppt/slides/slide13.xml><?xml version="1.0" encoding="utf-8"?>
+<file path=ppt/slides/slide12.xml><?xml version="1.0" encoding="utf-8"?>
 <p:sld xmlns:a="http://schemas.openxmlformats.org/drawingml/2006/main" xmlns:r="http://schemas.openxmlformats.org/officeDocument/2006/relationships" xmlns:p="http://schemas.openxmlformats.org/presentationml/2006/main">
   <p:cSld>
     <p:spTree>
@@ -8086,7 +7007,7 @@
 </p:sld>
 </file>
 
-<file path=ppt/slides/slide14.xml><?xml version="1.0" encoding="utf-8"?>
+<file path=ppt/slides/slide13.xml><?xml version="1.0" encoding="utf-8"?>
 <p:sld xmlns:a="http://schemas.openxmlformats.org/drawingml/2006/main" xmlns:r="http://schemas.openxmlformats.org/officeDocument/2006/relationships" xmlns:p="http://schemas.openxmlformats.org/presentationml/2006/main">
   <p:cSld>
     <p:spTree>
@@ -9156,7 +8077,7 @@
 </p:sld>
 </file>
 
-<file path=ppt/slides/slide15.xml><?xml version="1.0" encoding="utf-8"?>
+<file path=ppt/slides/slide14.xml><?xml version="1.0" encoding="utf-8"?>
 <p:sld xmlns:a="http://schemas.openxmlformats.org/drawingml/2006/main" xmlns:r="http://schemas.openxmlformats.org/officeDocument/2006/relationships" xmlns:p="http://schemas.openxmlformats.org/presentationml/2006/main">
   <p:cSld>
     <p:spTree>
@@ -10183,7 +9104,7 @@
 </p:sld>
 </file>
 
-<file path=ppt/slides/slide16.xml><?xml version="1.0" encoding="utf-8"?>
+<file path=ppt/slides/slide15.xml><?xml version="1.0" encoding="utf-8"?>
 <p:sld xmlns:a="http://schemas.openxmlformats.org/drawingml/2006/main" xmlns:r="http://schemas.openxmlformats.org/officeDocument/2006/relationships" xmlns:p="http://schemas.openxmlformats.org/presentationml/2006/main">
   <p:cSld>
     <p:spTree>
@@ -13225,495 +12146,6 @@
       </p:grpSpPr>
       <p:sp>
         <p:nvSpPr>
-          <p:cNvPr id="485380" name="Text Box 4"/>
-          <p:cNvSpPr txBox="1">
-            <a:spLocks noChangeArrowheads="1"/>
-          </p:cNvSpPr>
-          <p:nvPr/>
-        </p:nvSpPr>
-        <p:spPr bwMode="auto">
-          <a:xfrm>
-            <a:off x="838513" y="1556792"/>
-            <a:ext cx="7468227" cy="1553054"/>
-          </a:xfrm>
-          <a:prstGeom prst="rect">
-            <a:avLst/>
-          </a:prstGeom>
-          <a:noFill/>
-          <a:ln>
-            <a:noFill/>
-          </a:ln>
-          <a:effectLst/>
-          <a:extLst>
-            <a:ext uri="{909E8E84-426E-40DD-AFC4-6F175D3DCCD1}">
-              <a14:hiddenFill xmlns:a14="http://schemas.microsoft.com/office/drawing/2010/main">
-                <a:solidFill>
-                  <a:schemeClr val="accent1"/>
-                </a:solidFill>
-              </a14:hiddenFill>
-            </a:ext>
-            <a:ext uri="{91240B29-F687-4F45-9708-019B960494DF}">
-              <a14:hiddenLine xmlns:a14="http://schemas.microsoft.com/office/drawing/2010/main" w="12700">
-                <a:solidFill>
-                  <a:schemeClr val="tx1"/>
-                </a:solidFill>
-                <a:miter lim="800000"/>
-                <a:headEnd type="none" w="sm" len="sm"/>
-                <a:tailEnd type="none" w="sm" len="sm"/>
-              </a14:hiddenLine>
-            </a:ext>
-            <a:ext uri="{AF507438-7753-43E0-B8FC-AC1667EBCBE1}">
-              <a14:hiddenEffects xmlns:a14="http://schemas.microsoft.com/office/drawing/2010/main">
-                <a:effectLst>
-                  <a:outerShdw dist="35921" dir="2700000" algn="ctr" rotWithShape="0">
-                    <a:schemeClr val="bg2"/>
-                  </a:outerShdw>
-                </a:effectLst>
-              </a14:hiddenEffects>
-            </a:ext>
-          </a:extLst>
-        </p:spPr>
-        <p:txBody>
-          <a:bodyPr wrap="square">
-            <a:spAutoFit/>
-          </a:bodyPr>
-          <a:lstStyle>
-            <a:lvl1pPr marL="457200" indent="-457200" defTabSz="762000" eaLnBrk="0" hangingPunct="0">
-              <a:defRPr sz="2400">
-                <a:solidFill>
-                  <a:schemeClr val="tx1"/>
-                </a:solidFill>
-                <a:latin typeface="Times New Roman" pitchFamily="18" charset="0"/>
-              </a:defRPr>
-            </a:lvl1pPr>
-            <a:lvl2pPr marL="742950" indent="-285750" defTabSz="762000" eaLnBrk="0" hangingPunct="0">
-              <a:defRPr sz="2400">
-                <a:solidFill>
-                  <a:schemeClr val="tx1"/>
-                </a:solidFill>
-                <a:latin typeface="Times New Roman" pitchFamily="18" charset="0"/>
-              </a:defRPr>
-            </a:lvl2pPr>
-            <a:lvl3pPr marL="1143000" indent="-228600" defTabSz="762000" eaLnBrk="0" hangingPunct="0">
-              <a:defRPr sz="2400">
-                <a:solidFill>
-                  <a:schemeClr val="tx1"/>
-                </a:solidFill>
-                <a:latin typeface="Times New Roman" pitchFamily="18" charset="0"/>
-              </a:defRPr>
-            </a:lvl3pPr>
-            <a:lvl4pPr marL="1600200" indent="-228600" defTabSz="762000" eaLnBrk="0" hangingPunct="0">
-              <a:defRPr sz="2400">
-                <a:solidFill>
-                  <a:schemeClr val="tx1"/>
-                </a:solidFill>
-                <a:latin typeface="Times New Roman" pitchFamily="18" charset="0"/>
-              </a:defRPr>
-            </a:lvl4pPr>
-            <a:lvl5pPr marL="2057400" indent="-228600" defTabSz="762000" eaLnBrk="0" hangingPunct="0">
-              <a:defRPr sz="2400">
-                <a:solidFill>
-                  <a:schemeClr val="tx1"/>
-                </a:solidFill>
-                <a:latin typeface="Times New Roman" pitchFamily="18" charset="0"/>
-              </a:defRPr>
-            </a:lvl5pPr>
-            <a:lvl6pPr marL="2514600" indent="-228600" defTabSz="762000" eaLnBrk="0" fontAlgn="base" hangingPunct="0">
-              <a:spcBef>
-                <a:spcPct val="0"/>
-              </a:spcBef>
-              <a:spcAft>
-                <a:spcPct val="0"/>
-              </a:spcAft>
-              <a:defRPr sz="2400">
-                <a:solidFill>
-                  <a:schemeClr val="tx1"/>
-                </a:solidFill>
-                <a:latin typeface="Times New Roman" pitchFamily="18" charset="0"/>
-              </a:defRPr>
-            </a:lvl6pPr>
-            <a:lvl7pPr marL="2971800" indent="-228600" defTabSz="762000" eaLnBrk="0" fontAlgn="base" hangingPunct="0">
-              <a:spcBef>
-                <a:spcPct val="0"/>
-              </a:spcBef>
-              <a:spcAft>
-                <a:spcPct val="0"/>
-              </a:spcAft>
-              <a:defRPr sz="2400">
-                <a:solidFill>
-                  <a:schemeClr val="tx1"/>
-                </a:solidFill>
-                <a:latin typeface="Times New Roman" pitchFamily="18" charset="0"/>
-              </a:defRPr>
-            </a:lvl7pPr>
-            <a:lvl8pPr marL="3429000" indent="-228600" defTabSz="762000" eaLnBrk="0" fontAlgn="base" hangingPunct="0">
-              <a:spcBef>
-                <a:spcPct val="0"/>
-              </a:spcBef>
-              <a:spcAft>
-                <a:spcPct val="0"/>
-              </a:spcAft>
-              <a:defRPr sz="2400">
-                <a:solidFill>
-                  <a:schemeClr val="tx1"/>
-                </a:solidFill>
-                <a:latin typeface="Times New Roman" pitchFamily="18" charset="0"/>
-              </a:defRPr>
-            </a:lvl8pPr>
-            <a:lvl9pPr marL="3886200" indent="-228600" defTabSz="762000" eaLnBrk="0" fontAlgn="base" hangingPunct="0">
-              <a:spcBef>
-                <a:spcPct val="0"/>
-              </a:spcBef>
-              <a:spcAft>
-                <a:spcPct val="0"/>
-              </a:spcAft>
-              <a:defRPr sz="2400">
-                <a:solidFill>
-                  <a:schemeClr val="tx1"/>
-                </a:solidFill>
-                <a:latin typeface="Times New Roman" pitchFamily="18" charset="0"/>
-              </a:defRPr>
-            </a:lvl9pPr>
-          </a:lstStyle>
-          <a:p>
-            <a:pPr algn="ctr">
-              <a:lnSpc>
-                <a:spcPct val="150000"/>
-              </a:lnSpc>
-            </a:pPr>
-            <a:r>
-              <a:rPr lang="es-ES_tradnl" sz="2200" dirty="0">
-                <a:latin typeface="Arial" pitchFamily="34" charset="0"/>
-                <a:cs typeface="Arial" pitchFamily="34" charset="0"/>
-              </a:rPr>
-              <a:t>   </a:t>
-            </a:r>
-            <a:r>
-              <a:rPr lang="es-ES_tradnl" sz="2200" dirty="0">
-                <a:solidFill>
-                  <a:schemeClr val="bg2">
-                    <a:lumMod val="25000"/>
-                  </a:schemeClr>
-                </a:solidFill>
-                <a:latin typeface="Arial" pitchFamily="34" charset="0"/>
-                <a:cs typeface="Arial" pitchFamily="34" charset="0"/>
-              </a:rPr>
-              <a:t>Escribir la función </a:t>
-            </a:r>
-            <a:r>
-              <a:rPr lang="es-ES_tradnl" sz="2200" b="1" dirty="0" err="1">
-                <a:solidFill>
-                  <a:schemeClr val="accent6">
-                    <a:lumMod val="75000"/>
-                  </a:schemeClr>
-                </a:solidFill>
-                <a:latin typeface="Arial" pitchFamily="34" charset="0"/>
-                <a:cs typeface="Arial" pitchFamily="34" charset="0"/>
-              </a:rPr>
-              <a:t>imprime_caracteres</a:t>
-            </a:r>
-            <a:r>
-              <a:rPr lang="es-ES_tradnl" sz="2200" b="1" dirty="0">
-                <a:solidFill>
-                  <a:schemeClr val="accent6">
-                    <a:lumMod val="75000"/>
-                  </a:schemeClr>
-                </a:solidFill>
-                <a:latin typeface="Arial" pitchFamily="34" charset="0"/>
-                <a:cs typeface="Arial" pitchFamily="34" charset="0"/>
-              </a:rPr>
-              <a:t>(cadena)</a:t>
-            </a:r>
-            <a:r>
-              <a:rPr lang="es-ES_tradnl" sz="2200" dirty="0">
-                <a:solidFill>
-                  <a:schemeClr val="bg2">
-                    <a:lumMod val="25000"/>
-                  </a:schemeClr>
-                </a:solidFill>
-                <a:latin typeface="Arial" pitchFamily="34" charset="0"/>
-                <a:cs typeface="Arial" pitchFamily="34" charset="0"/>
-              </a:rPr>
-              <a:t> que recibe una cadena de caracteres e imprime los caracteres almacenados en la cadena.</a:t>
-            </a:r>
-            <a:endParaRPr lang="es-ES_tradnl" sz="2000" dirty="0">
-              <a:solidFill>
-                <a:schemeClr val="bg2">
-                  <a:lumMod val="25000"/>
-                </a:schemeClr>
-              </a:solidFill>
-              <a:latin typeface="Arial" pitchFamily="34" charset="0"/>
-              <a:cs typeface="Arial" pitchFamily="34" charset="0"/>
-            </a:endParaRPr>
-          </a:p>
-        </p:txBody>
-      </p:sp>
-      <p:sp>
-        <p:nvSpPr>
-          <p:cNvPr id="5" name="Rectangle 2"/>
-          <p:cNvSpPr>
-            <a:spLocks noChangeArrowheads="1"/>
-          </p:cNvSpPr>
-          <p:nvPr/>
-        </p:nvSpPr>
-        <p:spPr bwMode="auto">
-          <a:xfrm>
-            <a:off x="686427" y="65580"/>
-            <a:ext cx="7772400" cy="1544638"/>
-          </a:xfrm>
-          <a:prstGeom prst="rect">
-            <a:avLst/>
-          </a:prstGeom>
-          <a:noFill/>
-          <a:ln>
-            <a:noFill/>
-          </a:ln>
-          <a:effectLst/>
-          <a:extLst>
-            <a:ext uri="{909E8E84-426E-40DD-AFC4-6F175D3DCCD1}">
-              <a14:hiddenFill xmlns:a14="http://schemas.microsoft.com/office/drawing/2010/main">
-                <a:solidFill>
-                  <a:schemeClr val="accent1"/>
-                </a:solidFill>
-              </a14:hiddenFill>
-            </a:ext>
-            <a:ext uri="{91240B29-F687-4F45-9708-019B960494DF}">
-              <a14:hiddenLine xmlns:a14="http://schemas.microsoft.com/office/drawing/2010/main" w="9525">
-                <a:solidFill>
-                  <a:schemeClr val="tx1"/>
-                </a:solidFill>
-                <a:miter lim="800000"/>
-                <a:headEnd/>
-                <a:tailEnd/>
-              </a14:hiddenLine>
-            </a:ext>
-            <a:ext uri="{AF507438-7753-43E0-B8FC-AC1667EBCBE1}">
-              <a14:hiddenEffects xmlns:a14="http://schemas.microsoft.com/office/drawing/2010/main">
-                <a:effectLst>
-                  <a:outerShdw dist="35921" dir="2700000" algn="ctr" rotWithShape="0">
-                    <a:schemeClr val="bg2"/>
-                  </a:outerShdw>
-                </a:effectLst>
-              </a14:hiddenEffects>
-            </a:ext>
-          </a:extLst>
-        </p:spPr>
-        <p:txBody>
-          <a:bodyPr lIns="92075" tIns="46038" rIns="92075" bIns="46038" anchor="ctr"/>
-          <a:lstStyle/>
-          <a:p>
-            <a:pPr algn="ctr" eaLnBrk="0" hangingPunct="0">
-              <a:defRPr/>
-            </a:pPr>
-            <a:r>
-              <a:rPr lang="es-ES_tradnl" sz="4400" b="1" dirty="0">
-                <a:solidFill>
-                  <a:srgbClr val="0070C0"/>
-                </a:solidFill>
-                <a:effectLst>
-                  <a:outerShdw blurRad="38100" dist="38100" dir="2700000" algn="tl">
-                    <a:srgbClr val="C0C0C0"/>
-                  </a:outerShdw>
-                </a:effectLst>
-                <a:latin typeface="Dom Casual" charset="0"/>
-              </a:rPr>
-              <a:t>Actividad grupal</a:t>
-            </a:r>
-          </a:p>
-        </p:txBody>
-      </p:sp>
-      <p:pic>
-        <p:nvPicPr>
-          <p:cNvPr id="3" name="Imagen 2" descr="Imagen que contiene pequeño, juguete, tabla&#10;&#10;Descripción generada automáticamente">
-            <a:extLst>
-              <a:ext uri="{FF2B5EF4-FFF2-40B4-BE49-F238E27FC236}">
-                <a16:creationId xmlns:a16="http://schemas.microsoft.com/office/drawing/2014/main" id="{6CC8926E-A742-4361-94E7-56EF6C4E7D10}"/>
-              </a:ext>
-            </a:extLst>
-          </p:cNvPr>
-          <p:cNvPicPr>
-            <a:picLocks noChangeAspect="1"/>
-          </p:cNvPicPr>
-          <p:nvPr/>
-        </p:nvPicPr>
-        <p:blipFill>
-          <a:blip r:embed="rId2">
-            <a:extLst>
-              <a:ext uri="{28A0092B-C50C-407E-A947-70E740481C1C}">
-                <a14:useLocalDpi xmlns:a14="http://schemas.microsoft.com/office/drawing/2010/main" val="0"/>
-              </a:ext>
-            </a:extLst>
-          </a:blip>
-          <a:stretch>
-            <a:fillRect/>
-          </a:stretch>
-        </p:blipFill>
-        <p:spPr>
-          <a:xfrm>
-            <a:off x="2983057" y="3437928"/>
-            <a:ext cx="3173119" cy="2880320"/>
-          </a:xfrm>
-          <a:prstGeom prst="rect">
-            <a:avLst/>
-          </a:prstGeom>
-        </p:spPr>
-      </p:pic>
-    </p:spTree>
-    <p:extLst>
-      <p:ext uri="{BB962C8B-B14F-4D97-AF65-F5344CB8AC3E}">
-        <p14:creationId xmlns:p14="http://schemas.microsoft.com/office/powerpoint/2010/main" val="3247842942"/>
-      </p:ext>
-    </p:extLst>
-  </p:cSld>
-  <p:clrMapOvr>
-    <a:masterClrMapping/>
-  </p:clrMapOvr>
-  <p:timing>
-    <p:tnLst>
-      <p:par>
-        <p:cTn id="1" dur="indefinite" restart="never" nodeType="tmRoot">
-          <p:childTnLst>
-            <p:seq concurrent="1" nextAc="seek">
-              <p:cTn id="2" dur="indefinite" nodeType="mainSeq">
-                <p:childTnLst>
-                  <p:par>
-                    <p:cTn id="3" fill="hold" nodeType="clickPar">
-                      <p:stCondLst>
-                        <p:cond delay="indefinite"/>
-                      </p:stCondLst>
-                      <p:childTnLst>
-                        <p:par>
-                          <p:cTn id="4" fill="hold" nodeType="withGroup">
-                            <p:stCondLst>
-                              <p:cond delay="0"/>
-                            </p:stCondLst>
-                            <p:childTnLst>
-                              <p:par>
-                                <p:cTn id="5" presetID="2" presetClass="entr" presetSubtype="8" fill="hold" grpId="0" nodeType="clickEffect">
-                                  <p:stCondLst>
-                                    <p:cond delay="0"/>
-                                  </p:stCondLst>
-                                  <p:childTnLst>
-                                    <p:set>
-                                      <p:cBhvr>
-                                        <p:cTn id="6" dur="1" fill="hold">
-                                          <p:stCondLst>
-                                            <p:cond delay="0"/>
-                                          </p:stCondLst>
-                                        </p:cTn>
-                                        <p:tgtEl>
-                                          <p:spTgt spid="485380"/>
-                                        </p:tgtEl>
-                                        <p:attrNameLst>
-                                          <p:attrName>style.visibility</p:attrName>
-                                        </p:attrNameLst>
-                                      </p:cBhvr>
-                                      <p:to>
-                                        <p:strVal val="visible"/>
-                                      </p:to>
-                                    </p:set>
-                                    <p:anim calcmode="lin" valueType="num">
-                                      <p:cBhvr additive="base">
-                                        <p:cTn id="7" dur="500" fill="hold"/>
-                                        <p:tgtEl>
-                                          <p:spTgt spid="485380"/>
-                                        </p:tgtEl>
-                                        <p:attrNameLst>
-                                          <p:attrName>ppt_x</p:attrName>
-                                        </p:attrNameLst>
-                                      </p:cBhvr>
-                                      <p:tavLst>
-                                        <p:tav tm="0">
-                                          <p:val>
-                                            <p:strVal val="0-#ppt_w/2"/>
-                                          </p:val>
-                                        </p:tav>
-                                        <p:tav tm="100000">
-                                          <p:val>
-                                            <p:strVal val="#ppt_x"/>
-                                          </p:val>
-                                        </p:tav>
-                                      </p:tavLst>
-                                    </p:anim>
-                                    <p:anim calcmode="lin" valueType="num">
-                                      <p:cBhvr additive="base">
-                                        <p:cTn id="8" dur="500" fill="hold"/>
-                                        <p:tgtEl>
-                                          <p:spTgt spid="485380"/>
-                                        </p:tgtEl>
-                                        <p:attrNameLst>
-                                          <p:attrName>ppt_y</p:attrName>
-                                        </p:attrNameLst>
-                                      </p:cBhvr>
-                                      <p:tavLst>
-                                        <p:tav tm="0">
-                                          <p:val>
-                                            <p:strVal val="#ppt_y"/>
-                                          </p:val>
-                                        </p:tav>
-                                        <p:tav tm="100000">
-                                          <p:val>
-                                            <p:strVal val="#ppt_y"/>
-                                          </p:val>
-                                        </p:tav>
-                                      </p:tavLst>
-                                    </p:anim>
-                                  </p:childTnLst>
-                                </p:cTn>
-                              </p:par>
-                            </p:childTnLst>
-                          </p:cTn>
-                        </p:par>
-                      </p:childTnLst>
-                    </p:cTn>
-                  </p:par>
-                </p:childTnLst>
-              </p:cTn>
-              <p:prevCondLst>
-                <p:cond evt="onPrev" delay="0">
-                  <p:tgtEl>
-                    <p:sldTgt/>
-                  </p:tgtEl>
-                </p:cond>
-              </p:prevCondLst>
-              <p:nextCondLst>
-                <p:cond evt="onNext" delay="0">
-                  <p:tgtEl>
-                    <p:sldTgt/>
-                  </p:tgtEl>
-                </p:cond>
-              </p:nextCondLst>
-            </p:seq>
-          </p:childTnLst>
-        </p:cTn>
-      </p:par>
-    </p:tnLst>
-    <p:bldLst>
-      <p:bldP spid="485380" grpId="0" autoUpdateAnimBg="0"/>
-    </p:bldLst>
-  </p:timing>
-</p:sld>
-</file>
-
-<file path=ppt/slides/slide6.xml><?xml version="1.0" encoding="utf-8"?>
-<p:sld xmlns:a="http://schemas.openxmlformats.org/drawingml/2006/main" xmlns:r="http://schemas.openxmlformats.org/officeDocument/2006/relationships" xmlns:p="http://schemas.openxmlformats.org/presentationml/2006/main">
-  <p:cSld>
-    <p:spTree>
-      <p:nvGrpSpPr>
-        <p:cNvPr id="1" name=""/>
-        <p:cNvGrpSpPr/>
-        <p:nvPr/>
-      </p:nvGrpSpPr>
-      <p:grpSpPr>
-        <a:xfrm>
-          <a:off x="0" y="0"/>
-          <a:ext cx="0" cy="0"/>
-          <a:chOff x="0" y="0"/>
-          <a:chExt cx="0" cy="0"/>
-        </a:xfrm>
-      </p:grpSpPr>
-      <p:sp>
-        <p:nvSpPr>
           <p:cNvPr id="486402" name="Rectangle 2"/>
           <p:cNvSpPr>
             <a:spLocks noGrp="1" noChangeArrowheads="1"/>
@@ -14555,7 +12987,7 @@
 </p:sld>
 </file>
 
-<file path=ppt/slides/slide7.xml><?xml version="1.0" encoding="utf-8"?>
+<file path=ppt/slides/slide6.xml><?xml version="1.0" encoding="utf-8"?>
 <p:sld xmlns:a="http://schemas.openxmlformats.org/drawingml/2006/main" xmlns:r="http://schemas.openxmlformats.org/officeDocument/2006/relationships" xmlns:p="http://schemas.openxmlformats.org/presentationml/2006/main">
   <p:cSld>
     <p:spTree>
@@ -15146,7 +13578,7 @@
 </p:sld>
 </file>
 
-<file path=ppt/slides/slide8.xml><?xml version="1.0" encoding="utf-8"?>
+<file path=ppt/slides/slide7.xml><?xml version="1.0" encoding="utf-8"?>
 <p:sld xmlns:a="http://schemas.openxmlformats.org/drawingml/2006/main" xmlns:r="http://schemas.openxmlformats.org/officeDocument/2006/relationships" xmlns:p="http://schemas.openxmlformats.org/presentationml/2006/main">
   <p:cSld>
     <p:spTree>
@@ -16342,7 +14774,7 @@
 </p:sld>
 </file>
 
-<file path=ppt/slides/slide9.xml><?xml version="1.0" encoding="utf-8"?>
+<file path=ppt/slides/slide8.xml><?xml version="1.0" encoding="utf-8"?>
 <p:sld xmlns:a="http://schemas.openxmlformats.org/drawingml/2006/main" xmlns:r="http://schemas.openxmlformats.org/officeDocument/2006/relationships" xmlns:p="http://schemas.openxmlformats.org/presentationml/2006/main">
   <p:cSld>
     <p:spTree>
@@ -17171,6 +15603,1113 @@
     <p:extLst>
       <p:ext uri="{BB962C8B-B14F-4D97-AF65-F5344CB8AC3E}">
         <p14:creationId xmlns:p14="http://schemas.microsoft.com/office/powerpoint/2010/main" val="1030813155"/>
+      </p:ext>
+    </p:extLst>
+  </p:cSld>
+  <p:clrMapOvr>
+    <a:masterClrMapping/>
+  </p:clrMapOvr>
+</p:sld>
+</file>
+
+<file path=ppt/slides/slide9.xml><?xml version="1.0" encoding="utf-8"?>
+<p:sld xmlns:a="http://schemas.openxmlformats.org/drawingml/2006/main" xmlns:r="http://schemas.openxmlformats.org/officeDocument/2006/relationships" xmlns:p="http://schemas.openxmlformats.org/presentationml/2006/main">
+  <p:cSld>
+    <p:spTree>
+      <p:nvGrpSpPr>
+        <p:cNvPr id="1" name=""/>
+        <p:cNvGrpSpPr/>
+        <p:nvPr/>
+      </p:nvGrpSpPr>
+      <p:grpSpPr>
+        <a:xfrm>
+          <a:off x="0" y="0"/>
+          <a:ext cx="0" cy="0"/>
+          <a:chOff x="0" y="0"/>
+          <a:chExt cx="0" cy="0"/>
+        </a:xfrm>
+      </p:grpSpPr>
+      <p:sp>
+        <p:nvSpPr>
+          <p:cNvPr id="470018" name="Rectangle 2"/>
+          <p:cNvSpPr>
+            <a:spLocks noGrp="1" noChangeArrowheads="1"/>
+          </p:cNvSpPr>
+          <p:nvPr>
+            <p:ph type="title"/>
+          </p:nvPr>
+        </p:nvSpPr>
+        <p:spPr>
+          <a:xfrm>
+            <a:off x="1070992" y="-90264"/>
+            <a:ext cx="7317432" cy="1143000"/>
+          </a:xfrm>
+        </p:spPr>
+        <p:txBody>
+          <a:bodyPr/>
+          <a:lstStyle/>
+          <a:p>
+            <a:pPr algn="ctr" eaLnBrk="1" hangingPunct="1">
+              <a:defRPr/>
+            </a:pPr>
+            <a:r>
+              <a:rPr lang="es-ES_tradnl" b="1" dirty="0">
+                <a:solidFill>
+                  <a:schemeClr val="accent4">
+                    <a:lumMod val="50000"/>
+                  </a:schemeClr>
+                </a:solidFill>
+                <a:effectLst>
+                  <a:outerShdw blurRad="38100" dist="38100" dir="2700000" algn="tl">
+                    <a:srgbClr val="C0C0C0"/>
+                  </a:outerShdw>
+                </a:effectLst>
+                <a:latin typeface="Dom Casual" charset="0"/>
+              </a:rPr>
+              <a:t>Funciones y métodos</a:t>
+            </a:r>
+          </a:p>
+        </p:txBody>
+      </p:sp>
+      <p:graphicFrame>
+        <p:nvGraphicFramePr>
+          <p:cNvPr id="6" name="Tabla 5">
+            <a:extLst>
+              <a:ext uri="{FF2B5EF4-FFF2-40B4-BE49-F238E27FC236}">
+                <a16:creationId xmlns:a16="http://schemas.microsoft.com/office/drawing/2014/main" id="{BE426977-61B5-479E-97A7-3FE465BE2807}"/>
+              </a:ext>
+            </a:extLst>
+          </p:cNvPr>
+          <p:cNvGraphicFramePr>
+            <a:graphicFrameLocks noGrp="1"/>
+          </p:cNvGraphicFramePr>
+          <p:nvPr>
+            <p:extLst>
+              <p:ext uri="{D42A27DB-BD31-4B8C-83A1-F6EECF244321}">
+                <p14:modId xmlns:p14="http://schemas.microsoft.com/office/powerpoint/2010/main" val="3826346643"/>
+              </p:ext>
+            </p:extLst>
+          </p:nvPr>
+        </p:nvGraphicFramePr>
+        <p:xfrm>
+          <a:off x="395536" y="1196752"/>
+          <a:ext cx="8064896" cy="5112567"/>
+        </p:xfrm>
+        <a:graphic>
+          <a:graphicData uri="http://schemas.openxmlformats.org/drawingml/2006/table">
+            <a:tbl>
+              <a:tblPr firstRow="1" firstCol="1" bandRow="1">
+                <a:tableStyleId>{5C22544A-7EE6-4342-B048-85BDC9FD1C3A}</a:tableStyleId>
+              </a:tblPr>
+              <a:tblGrid>
+                <a:gridCol w="2643669">
+                  <a:extLst>
+                    <a:ext uri="{9D8B030D-6E8A-4147-A177-3AD203B41FA5}">
+                      <a16:colId xmlns:a16="http://schemas.microsoft.com/office/drawing/2014/main" val="1876588526"/>
+                    </a:ext>
+                  </a:extLst>
+                </a:gridCol>
+                <a:gridCol w="1460787">
+                  <a:extLst>
+                    <a:ext uri="{9D8B030D-6E8A-4147-A177-3AD203B41FA5}">
+                      <a16:colId xmlns:a16="http://schemas.microsoft.com/office/drawing/2014/main" val="4057113337"/>
+                    </a:ext>
+                  </a:extLst>
+                </a:gridCol>
+                <a:gridCol w="3960440">
+                  <a:extLst>
+                    <a:ext uri="{9D8B030D-6E8A-4147-A177-3AD203B41FA5}">
+                      <a16:colId xmlns:a16="http://schemas.microsoft.com/office/drawing/2014/main" val="829240010"/>
+                    </a:ext>
+                  </a:extLst>
+                </a:gridCol>
+              </a:tblGrid>
+              <a:tr h="259787">
+                <a:tc>
+                  <a:txBody>
+                    <a:bodyPr/>
+                    <a:lstStyle/>
+                    <a:p>
+                      <a:pPr algn="ctr">
+                        <a:lnSpc>
+                          <a:spcPct val="107000"/>
+                        </a:lnSpc>
+                        <a:spcAft>
+                          <a:spcPts val="0"/>
+                        </a:spcAft>
+                      </a:pPr>
+                      <a:r>
+                        <a:rPr lang="es-MX" sz="1600" dirty="0">
+                          <a:effectLst/>
+                          <a:latin typeface="+mn-lt"/>
+                        </a:rPr>
+                        <a:t>Explicación</a:t>
+                      </a:r>
+                      <a:endParaRPr lang="es-MX" sz="1600" dirty="0">
+                        <a:effectLst/>
+                        <a:latin typeface="+mn-lt"/>
+                        <a:ea typeface="Calibri" panose="020F0502020204030204" pitchFamily="34" charset="0"/>
+                        <a:cs typeface="Times New Roman" panose="02020603050405020304" pitchFamily="18" charset="0"/>
+                      </a:endParaRPr>
+                    </a:p>
+                  </a:txBody>
+                  <a:tcPr marL="28008" marR="28008" marT="0" marB="0">
+                    <a:solidFill>
+                      <a:schemeClr val="accent4">
+                        <a:lumMod val="50000"/>
+                      </a:schemeClr>
+                    </a:solidFill>
+                  </a:tcPr>
+                </a:tc>
+                <a:tc>
+                  <a:txBody>
+                    <a:bodyPr/>
+                    <a:lstStyle/>
+                    <a:p>
+                      <a:pPr algn="ctr">
+                        <a:lnSpc>
+                          <a:spcPct val="107000"/>
+                        </a:lnSpc>
+                        <a:spcAft>
+                          <a:spcPts val="0"/>
+                        </a:spcAft>
+                      </a:pPr>
+                      <a:r>
+                        <a:rPr lang="es-MX" sz="1600" dirty="0">
+                          <a:effectLst/>
+                          <a:latin typeface="+mn-lt"/>
+                        </a:rPr>
+                        <a:t>Método</a:t>
+                      </a:r>
+                      <a:endParaRPr lang="es-MX" sz="1600" dirty="0">
+                        <a:effectLst/>
+                        <a:latin typeface="+mn-lt"/>
+                        <a:ea typeface="Calibri" panose="020F0502020204030204" pitchFamily="34" charset="0"/>
+                        <a:cs typeface="Times New Roman" panose="02020603050405020304" pitchFamily="18" charset="0"/>
+                      </a:endParaRPr>
+                    </a:p>
+                  </a:txBody>
+                  <a:tcPr marL="28008" marR="28008" marT="0" marB="0">
+                    <a:solidFill>
+                      <a:schemeClr val="accent4">
+                        <a:lumMod val="50000"/>
+                      </a:schemeClr>
+                    </a:solidFill>
+                  </a:tcPr>
+                </a:tc>
+                <a:tc>
+                  <a:txBody>
+                    <a:bodyPr/>
+                    <a:lstStyle/>
+                    <a:p>
+                      <a:pPr algn="ctr">
+                        <a:lnSpc>
+                          <a:spcPct val="107000"/>
+                        </a:lnSpc>
+                        <a:spcAft>
+                          <a:spcPts val="0"/>
+                        </a:spcAft>
+                      </a:pPr>
+                      <a:r>
+                        <a:rPr lang="es-MX" sz="1600" dirty="0">
+                          <a:effectLst/>
+                          <a:latin typeface="+mn-lt"/>
+                        </a:rPr>
+                        <a:t>Ejemplo</a:t>
+                      </a:r>
+                      <a:endParaRPr lang="es-MX" sz="1600" dirty="0">
+                        <a:effectLst/>
+                        <a:latin typeface="+mn-lt"/>
+                        <a:ea typeface="Calibri" panose="020F0502020204030204" pitchFamily="34" charset="0"/>
+                        <a:cs typeface="Times New Roman" panose="02020603050405020304" pitchFamily="18" charset="0"/>
+                      </a:endParaRPr>
+                    </a:p>
+                  </a:txBody>
+                  <a:tcPr marL="28008" marR="28008" marT="0" marB="0">
+                    <a:solidFill>
+                      <a:schemeClr val="accent4">
+                        <a:lumMod val="50000"/>
+                      </a:schemeClr>
+                    </a:solidFill>
+                  </a:tcPr>
+                </a:tc>
+                <a:extLst>
+                  <a:ext uri="{0D108BD9-81ED-4DB2-BD59-A6C34878D82A}">
+                    <a16:rowId xmlns:a16="http://schemas.microsoft.com/office/drawing/2014/main" val="180739552"/>
+                  </a:ext>
+                </a:extLst>
+              </a:tr>
+              <a:tr h="1821488">
+                <a:tc>
+                  <a:txBody>
+                    <a:bodyPr/>
+                    <a:lstStyle/>
+                    <a:p>
+                      <a:pPr marL="0" algn="ctr" defTabSz="914400" rtl="0" eaLnBrk="1" latinLnBrk="0" hangingPunct="1">
+                        <a:lnSpc>
+                          <a:spcPct val="107000"/>
+                        </a:lnSpc>
+                        <a:spcAft>
+                          <a:spcPts val="0"/>
+                        </a:spcAft>
+                      </a:pPr>
+                      <a:r>
+                        <a:rPr lang="es-MX" sz="1600" b="0" kern="1200" dirty="0">
+                          <a:solidFill>
+                            <a:schemeClr val="lt1"/>
+                          </a:solidFill>
+                          <a:effectLst/>
+                          <a:latin typeface="+mn-lt"/>
+                          <a:ea typeface="+mn-ea"/>
+                          <a:cs typeface="+mn-cs"/>
+                        </a:rPr>
+                        <a:t>Regresa una nueva cadena con el contenido de la cadena original con todos los caracteres en mayúscula.</a:t>
+                      </a:r>
+                    </a:p>
+                  </a:txBody>
+                  <a:tcPr marL="68580" marR="68580" marT="0" marB="0" anchor="ctr" anchorCtr="1">
+                    <a:solidFill>
+                      <a:schemeClr val="accent4">
+                        <a:lumMod val="50000"/>
+                      </a:schemeClr>
+                    </a:solidFill>
+                  </a:tcPr>
+                </a:tc>
+                <a:tc>
+                  <a:txBody>
+                    <a:bodyPr/>
+                    <a:lstStyle/>
+                    <a:p>
+                      <a:pPr>
+                        <a:lnSpc>
+                          <a:spcPct val="107000"/>
+                        </a:lnSpc>
+                        <a:spcAft>
+                          <a:spcPts val="0"/>
+                        </a:spcAft>
+                      </a:pPr>
+                      <a:r>
+                        <a:rPr lang="es-MX" sz="1800" b="1" kern="1200" dirty="0" err="1">
+                          <a:solidFill>
+                            <a:schemeClr val="dk1"/>
+                          </a:solidFill>
+                          <a:effectLst/>
+                          <a:latin typeface="+mn-lt"/>
+                          <a:ea typeface="+mn-ea"/>
+                          <a:cs typeface="+mn-cs"/>
+                        </a:rPr>
+                        <a:t>upper</a:t>
+                      </a:r>
+                      <a:r>
+                        <a:rPr lang="es-MX" sz="1800" b="1" kern="1200" dirty="0">
+                          <a:solidFill>
+                            <a:schemeClr val="dk1"/>
+                          </a:solidFill>
+                          <a:effectLst/>
+                          <a:latin typeface="+mn-lt"/>
+                          <a:ea typeface="+mn-ea"/>
+                          <a:cs typeface="+mn-cs"/>
+                        </a:rPr>
+                        <a:t>()</a:t>
+                      </a:r>
+                    </a:p>
+                  </a:txBody>
+                  <a:tcPr marL="68580" marR="68580" marT="0" marB="0" anchor="ctr" anchorCtr="1">
+                    <a:solidFill>
+                      <a:schemeClr val="accent3">
+                        <a:lumMod val="20000"/>
+                        <a:lumOff val="80000"/>
+                      </a:schemeClr>
+                    </a:solidFill>
+                  </a:tcPr>
+                </a:tc>
+                <a:tc>
+                  <a:txBody>
+                    <a:bodyPr/>
+                    <a:lstStyle/>
+                    <a:p>
+                      <a:pPr marL="0" marR="0" lvl="0" indent="0" algn="l" defTabSz="914400" rtl="0" eaLnBrk="1" fontAlgn="auto" latinLnBrk="0" hangingPunct="1">
+                        <a:lnSpc>
+                          <a:spcPct val="107000"/>
+                        </a:lnSpc>
+                        <a:spcBef>
+                          <a:spcPts val="0"/>
+                        </a:spcBef>
+                        <a:spcAft>
+                          <a:spcPts val="0"/>
+                        </a:spcAft>
+                        <a:buClrTx/>
+                        <a:buSzTx/>
+                        <a:buFontTx/>
+                        <a:buNone/>
+                        <a:tabLst/>
+                        <a:defRPr/>
+                      </a:pPr>
+                      <a:r>
+                        <a:rPr lang="es-MX" sz="1800" b="1" dirty="0">
+                          <a:effectLst/>
+                          <a:latin typeface="+mn-lt"/>
+                        </a:rPr>
+                        <a:t>cadena = "Hola Mundo"</a:t>
+                      </a:r>
+                    </a:p>
+                    <a:p>
+                      <a:pPr>
+                        <a:lnSpc>
+                          <a:spcPct val="107000"/>
+                        </a:lnSpc>
+                        <a:spcAft>
+                          <a:spcPts val="0"/>
+                        </a:spcAft>
+                      </a:pPr>
+                      <a:r>
+                        <a:rPr lang="es-MX" sz="1800" b="1" kern="1200" dirty="0">
+                          <a:solidFill>
+                            <a:schemeClr val="dk1"/>
+                          </a:solidFill>
+                          <a:effectLst/>
+                          <a:latin typeface="+mn-lt"/>
+                          <a:ea typeface="+mn-ea"/>
+                          <a:cs typeface="+mn-cs"/>
+                        </a:rPr>
+                        <a:t>cadena2=</a:t>
+                      </a:r>
+                      <a:r>
+                        <a:rPr lang="es-MX" sz="1800" b="1" kern="1200" dirty="0" err="1">
+                          <a:solidFill>
+                            <a:schemeClr val="dk1"/>
+                          </a:solidFill>
+                          <a:effectLst/>
+                          <a:latin typeface="+mn-lt"/>
+                          <a:ea typeface="+mn-ea"/>
+                          <a:cs typeface="+mn-cs"/>
+                        </a:rPr>
+                        <a:t>cadena.upper</a:t>
+                      </a:r>
+                      <a:r>
+                        <a:rPr lang="es-MX" sz="1800" b="1" kern="1200" dirty="0">
+                          <a:solidFill>
+                            <a:schemeClr val="dk1"/>
+                          </a:solidFill>
+                          <a:effectLst/>
+                          <a:latin typeface="+mn-lt"/>
+                          <a:ea typeface="+mn-ea"/>
+                          <a:cs typeface="+mn-cs"/>
+                        </a:rPr>
+                        <a:t>()</a:t>
+                      </a:r>
+                    </a:p>
+                    <a:p>
+                      <a:pPr>
+                        <a:lnSpc>
+                          <a:spcPct val="107000"/>
+                        </a:lnSpc>
+                        <a:spcAft>
+                          <a:spcPts val="0"/>
+                        </a:spcAft>
+                      </a:pPr>
+                      <a:r>
+                        <a:rPr lang="es-MX" sz="1800" b="1" kern="1200" dirty="0" err="1">
+                          <a:solidFill>
+                            <a:schemeClr val="dk1"/>
+                          </a:solidFill>
+                          <a:effectLst/>
+                          <a:latin typeface="+mn-lt"/>
+                          <a:ea typeface="+mn-ea"/>
+                          <a:cs typeface="+mn-cs"/>
+                        </a:rPr>
+                        <a:t>print</a:t>
+                      </a:r>
+                      <a:r>
+                        <a:rPr lang="es-MX" sz="1800" b="1" kern="1200" dirty="0">
+                          <a:solidFill>
+                            <a:schemeClr val="dk1"/>
+                          </a:solidFill>
+                          <a:effectLst/>
+                          <a:latin typeface="+mn-lt"/>
+                          <a:ea typeface="+mn-ea"/>
+                          <a:cs typeface="+mn-cs"/>
+                        </a:rPr>
+                        <a:t>(cadena)</a:t>
+                      </a:r>
+                    </a:p>
+                    <a:p>
+                      <a:pPr>
+                        <a:lnSpc>
+                          <a:spcPct val="107000"/>
+                        </a:lnSpc>
+                        <a:spcAft>
+                          <a:spcPts val="0"/>
+                        </a:spcAft>
+                      </a:pPr>
+                      <a:r>
+                        <a:rPr lang="es-MX" sz="1800" b="1" kern="1200" dirty="0" err="1">
+                          <a:solidFill>
+                            <a:schemeClr val="dk1"/>
+                          </a:solidFill>
+                          <a:effectLst/>
+                          <a:latin typeface="+mn-lt"/>
+                          <a:ea typeface="+mn-ea"/>
+                          <a:cs typeface="+mn-cs"/>
+                        </a:rPr>
+                        <a:t>print</a:t>
+                      </a:r>
+                      <a:r>
+                        <a:rPr lang="es-MX" sz="1800" b="1" kern="1200" dirty="0">
+                          <a:solidFill>
+                            <a:schemeClr val="dk1"/>
+                          </a:solidFill>
+                          <a:effectLst/>
+                          <a:latin typeface="+mn-lt"/>
+                          <a:ea typeface="+mn-ea"/>
+                          <a:cs typeface="+mn-cs"/>
+                        </a:rPr>
+                        <a:t>(cadena2)</a:t>
+                      </a:r>
+                    </a:p>
+                    <a:p>
+                      <a:pPr>
+                        <a:lnSpc>
+                          <a:spcPct val="107000"/>
+                        </a:lnSpc>
+                        <a:spcAft>
+                          <a:spcPts val="0"/>
+                        </a:spcAft>
+                      </a:pPr>
+                      <a:r>
+                        <a:rPr lang="es-MX" sz="1800" b="0" kern="1200" dirty="0">
+                          <a:solidFill>
+                            <a:schemeClr val="dk1"/>
+                          </a:solidFill>
+                          <a:effectLst/>
+                          <a:latin typeface="+mn-lt"/>
+                          <a:ea typeface="+mn-ea"/>
+                          <a:cs typeface="+mn-cs"/>
+                        </a:rPr>
+                        <a:t>Hola Mundo</a:t>
+                      </a:r>
+                    </a:p>
+                    <a:p>
+                      <a:pPr>
+                        <a:lnSpc>
+                          <a:spcPct val="107000"/>
+                        </a:lnSpc>
+                        <a:spcAft>
+                          <a:spcPts val="0"/>
+                        </a:spcAft>
+                      </a:pPr>
+                      <a:r>
+                        <a:rPr lang="es-MX" sz="1800" b="0" kern="1200" dirty="0">
+                          <a:solidFill>
+                            <a:schemeClr val="dk1"/>
+                          </a:solidFill>
+                          <a:effectLst/>
+                          <a:latin typeface="+mn-lt"/>
+                          <a:ea typeface="+mn-ea"/>
+                          <a:cs typeface="+mn-cs"/>
+                        </a:rPr>
+                        <a:t>HOLA MUNDO</a:t>
+                      </a:r>
+                      <a:endParaRPr lang="es-MX" sz="1800" b="1" kern="1200" dirty="0">
+                        <a:solidFill>
+                          <a:schemeClr val="dk1"/>
+                        </a:solidFill>
+                        <a:effectLst/>
+                        <a:latin typeface="+mn-lt"/>
+                        <a:ea typeface="+mn-ea"/>
+                        <a:cs typeface="+mn-cs"/>
+                      </a:endParaRPr>
+                    </a:p>
+                  </a:txBody>
+                  <a:tcPr marL="68580" marR="68580" marT="0" marB="0" anchor="ctr" anchorCtr="1">
+                    <a:solidFill>
+                      <a:schemeClr val="accent3">
+                        <a:lumMod val="20000"/>
+                        <a:lumOff val="80000"/>
+                      </a:schemeClr>
+                    </a:solidFill>
+                  </a:tcPr>
+                </a:tc>
+                <a:extLst>
+                  <a:ext uri="{0D108BD9-81ED-4DB2-BD59-A6C34878D82A}">
+                    <a16:rowId xmlns:a16="http://schemas.microsoft.com/office/drawing/2014/main" val="18612594"/>
+                  </a:ext>
+                </a:extLst>
+              </a:tr>
+              <a:tr h="1515646">
+                <a:tc>
+                  <a:txBody>
+                    <a:bodyPr/>
+                    <a:lstStyle/>
+                    <a:p>
+                      <a:pPr marL="0" algn="ctr" defTabSz="914400" rtl="0" eaLnBrk="1" latinLnBrk="0" hangingPunct="1">
+                        <a:lnSpc>
+                          <a:spcPct val="107000"/>
+                        </a:lnSpc>
+                        <a:spcAft>
+                          <a:spcPts val="0"/>
+                        </a:spcAft>
+                      </a:pPr>
+                      <a:r>
+                        <a:rPr lang="es-MX" sz="1600" b="0" kern="1200" dirty="0">
+                          <a:solidFill>
+                            <a:schemeClr val="lt1"/>
+                          </a:solidFill>
+                          <a:effectLst/>
+                          <a:latin typeface="+mn-lt"/>
+                          <a:ea typeface="+mn-ea"/>
+                          <a:cs typeface="+mn-cs"/>
+                        </a:rPr>
+                        <a:t>Regresa una nueva cadena con el contenido de la cadena original con todos los caracteres en minúscula.</a:t>
+                      </a:r>
+                    </a:p>
+                  </a:txBody>
+                  <a:tcPr marL="68580" marR="68580" marT="0" marB="0" anchor="ctr" anchorCtr="1">
+                    <a:solidFill>
+                      <a:schemeClr val="accent4">
+                        <a:lumMod val="50000"/>
+                      </a:schemeClr>
+                    </a:solidFill>
+                  </a:tcPr>
+                </a:tc>
+                <a:tc>
+                  <a:txBody>
+                    <a:bodyPr/>
+                    <a:lstStyle/>
+                    <a:p>
+                      <a:pPr>
+                        <a:lnSpc>
+                          <a:spcPct val="107000"/>
+                        </a:lnSpc>
+                        <a:spcAft>
+                          <a:spcPts val="0"/>
+                        </a:spcAft>
+                      </a:pPr>
+                      <a:r>
+                        <a:rPr lang="es-MX" sz="1800" b="1" kern="1200" dirty="0" err="1">
+                          <a:solidFill>
+                            <a:schemeClr val="dk1"/>
+                          </a:solidFill>
+                          <a:effectLst/>
+                          <a:latin typeface="+mn-lt"/>
+                          <a:ea typeface="+mn-ea"/>
+                          <a:cs typeface="+mn-cs"/>
+                        </a:rPr>
+                        <a:t>lower</a:t>
+                      </a:r>
+                      <a:r>
+                        <a:rPr lang="es-MX" sz="1800" b="1" kern="1200" dirty="0">
+                          <a:solidFill>
+                            <a:schemeClr val="dk1"/>
+                          </a:solidFill>
+                          <a:effectLst/>
+                          <a:latin typeface="+mn-lt"/>
+                          <a:ea typeface="+mn-ea"/>
+                          <a:cs typeface="+mn-cs"/>
+                        </a:rPr>
+                        <a:t>()</a:t>
+                      </a:r>
+                    </a:p>
+                  </a:txBody>
+                  <a:tcPr marL="68580" marR="68580" marT="0" marB="0" anchor="ctr" anchorCtr="1">
+                    <a:solidFill>
+                      <a:schemeClr val="accent3">
+                        <a:lumMod val="20000"/>
+                        <a:lumOff val="80000"/>
+                      </a:schemeClr>
+                    </a:solidFill>
+                  </a:tcPr>
+                </a:tc>
+                <a:tc>
+                  <a:txBody>
+                    <a:bodyPr/>
+                    <a:lstStyle/>
+                    <a:p>
+                      <a:pPr>
+                        <a:lnSpc>
+                          <a:spcPct val="107000"/>
+                        </a:lnSpc>
+                        <a:spcAft>
+                          <a:spcPts val="0"/>
+                        </a:spcAft>
+                      </a:pPr>
+                      <a:r>
+                        <a:rPr lang="es-MX" sz="1800" b="1" kern="1200" dirty="0">
+                          <a:solidFill>
+                            <a:schemeClr val="dk1"/>
+                          </a:solidFill>
+                          <a:effectLst/>
+                          <a:latin typeface="+mn-lt"/>
+                          <a:ea typeface="+mn-ea"/>
+                          <a:cs typeface="+mn-cs"/>
+                        </a:rPr>
+                        <a:t>cadena2=</a:t>
+                      </a:r>
+                      <a:r>
+                        <a:rPr lang="es-MX" sz="1800" b="1" kern="1200" dirty="0" err="1">
+                          <a:solidFill>
+                            <a:schemeClr val="dk1"/>
+                          </a:solidFill>
+                          <a:effectLst/>
+                          <a:latin typeface="+mn-lt"/>
+                          <a:ea typeface="+mn-ea"/>
+                          <a:cs typeface="+mn-cs"/>
+                        </a:rPr>
+                        <a:t>cadena.lower</a:t>
+                      </a:r>
+                      <a:r>
+                        <a:rPr lang="es-MX" sz="1800" b="1" kern="1200" dirty="0">
+                          <a:solidFill>
+                            <a:schemeClr val="dk1"/>
+                          </a:solidFill>
+                          <a:effectLst/>
+                          <a:latin typeface="+mn-lt"/>
+                          <a:ea typeface="+mn-ea"/>
+                          <a:cs typeface="+mn-cs"/>
+                        </a:rPr>
+                        <a:t>()</a:t>
+                      </a:r>
+                    </a:p>
+                    <a:p>
+                      <a:pPr>
+                        <a:lnSpc>
+                          <a:spcPct val="107000"/>
+                        </a:lnSpc>
+                        <a:spcAft>
+                          <a:spcPts val="0"/>
+                        </a:spcAft>
+                      </a:pPr>
+                      <a:r>
+                        <a:rPr lang="es-MX" sz="1800" b="1" kern="1200" dirty="0" err="1">
+                          <a:solidFill>
+                            <a:schemeClr val="dk1"/>
+                          </a:solidFill>
+                          <a:effectLst/>
+                          <a:latin typeface="+mn-lt"/>
+                          <a:ea typeface="+mn-ea"/>
+                          <a:cs typeface="+mn-cs"/>
+                        </a:rPr>
+                        <a:t>print</a:t>
+                      </a:r>
+                      <a:r>
+                        <a:rPr lang="es-MX" sz="1800" b="1" kern="1200" dirty="0">
+                          <a:solidFill>
+                            <a:schemeClr val="dk1"/>
+                          </a:solidFill>
+                          <a:effectLst/>
+                          <a:latin typeface="+mn-lt"/>
+                          <a:ea typeface="+mn-ea"/>
+                          <a:cs typeface="+mn-cs"/>
+                        </a:rPr>
+                        <a:t>(cadena)</a:t>
+                      </a:r>
+                    </a:p>
+                    <a:p>
+                      <a:pPr>
+                        <a:lnSpc>
+                          <a:spcPct val="107000"/>
+                        </a:lnSpc>
+                        <a:spcAft>
+                          <a:spcPts val="0"/>
+                        </a:spcAft>
+                      </a:pPr>
+                      <a:r>
+                        <a:rPr lang="es-MX" sz="1800" b="1" kern="1200" dirty="0" err="1">
+                          <a:solidFill>
+                            <a:schemeClr val="dk1"/>
+                          </a:solidFill>
+                          <a:effectLst/>
+                          <a:latin typeface="+mn-lt"/>
+                          <a:ea typeface="+mn-ea"/>
+                          <a:cs typeface="+mn-cs"/>
+                        </a:rPr>
+                        <a:t>print</a:t>
+                      </a:r>
+                      <a:r>
+                        <a:rPr lang="es-MX" sz="1800" b="1" kern="1200" dirty="0">
+                          <a:solidFill>
+                            <a:schemeClr val="dk1"/>
+                          </a:solidFill>
+                          <a:effectLst/>
+                          <a:latin typeface="+mn-lt"/>
+                          <a:ea typeface="+mn-ea"/>
+                          <a:cs typeface="+mn-cs"/>
+                        </a:rPr>
+                        <a:t>(cadena2)</a:t>
+                      </a:r>
+                    </a:p>
+                    <a:p>
+                      <a:pPr>
+                        <a:lnSpc>
+                          <a:spcPct val="107000"/>
+                        </a:lnSpc>
+                        <a:spcAft>
+                          <a:spcPts val="0"/>
+                        </a:spcAft>
+                      </a:pPr>
+                      <a:r>
+                        <a:rPr lang="es-MX" sz="1800" b="0" kern="1200" dirty="0">
+                          <a:solidFill>
+                            <a:schemeClr val="dk1"/>
+                          </a:solidFill>
+                          <a:effectLst/>
+                          <a:latin typeface="+mn-lt"/>
+                          <a:ea typeface="+mn-ea"/>
+                          <a:cs typeface="+mn-cs"/>
+                        </a:rPr>
+                        <a:t>Hola Mundo</a:t>
+                      </a:r>
+                    </a:p>
+                    <a:p>
+                      <a:pPr>
+                        <a:lnSpc>
+                          <a:spcPct val="107000"/>
+                        </a:lnSpc>
+                        <a:spcAft>
+                          <a:spcPts val="0"/>
+                        </a:spcAft>
+                      </a:pPr>
+                      <a:r>
+                        <a:rPr lang="es-MX" sz="1800" b="0" kern="1200" dirty="0">
+                          <a:solidFill>
+                            <a:schemeClr val="dk1"/>
+                          </a:solidFill>
+                          <a:effectLst/>
+                          <a:latin typeface="+mn-lt"/>
+                          <a:ea typeface="+mn-ea"/>
+                          <a:cs typeface="+mn-cs"/>
+                        </a:rPr>
+                        <a:t>hola mundo</a:t>
+                      </a:r>
+                      <a:endParaRPr lang="es-MX" sz="1800" b="1" kern="1200" dirty="0">
+                        <a:solidFill>
+                          <a:schemeClr val="dk1"/>
+                        </a:solidFill>
+                        <a:effectLst/>
+                        <a:latin typeface="+mn-lt"/>
+                        <a:ea typeface="+mn-ea"/>
+                        <a:cs typeface="+mn-cs"/>
+                      </a:endParaRPr>
+                    </a:p>
+                  </a:txBody>
+                  <a:tcPr marL="68580" marR="68580" marT="0" marB="0" anchor="ctr" anchorCtr="1">
+                    <a:solidFill>
+                      <a:schemeClr val="accent3">
+                        <a:lumMod val="20000"/>
+                        <a:lumOff val="80000"/>
+                      </a:schemeClr>
+                    </a:solidFill>
+                  </a:tcPr>
+                </a:tc>
+                <a:extLst>
+                  <a:ext uri="{0D108BD9-81ED-4DB2-BD59-A6C34878D82A}">
+                    <a16:rowId xmlns:a16="http://schemas.microsoft.com/office/drawing/2014/main" val="3136739256"/>
+                  </a:ext>
+                </a:extLst>
+              </a:tr>
+              <a:tr h="1515646">
+                <a:tc>
+                  <a:txBody>
+                    <a:bodyPr/>
+                    <a:lstStyle/>
+                    <a:p>
+                      <a:pPr algn="ctr">
+                        <a:lnSpc>
+                          <a:spcPct val="107000"/>
+                        </a:lnSpc>
+                        <a:spcAft>
+                          <a:spcPts val="0"/>
+                        </a:spcAft>
+                      </a:pPr>
+                      <a:r>
+                        <a:rPr lang="es-MX" sz="1600" b="0" kern="1200" dirty="0">
+                          <a:solidFill>
+                            <a:schemeClr val="lt1"/>
+                          </a:solidFill>
+                          <a:effectLst/>
+                          <a:latin typeface="+mn-lt"/>
+                          <a:ea typeface="+mn-ea"/>
+                          <a:cs typeface="+mn-cs"/>
+                        </a:rPr>
+                        <a:t>Regresa una nueva cadena con el contenido de la cadena original con la primera letra en mayúscula</a:t>
+                      </a:r>
+                    </a:p>
+                  </a:txBody>
+                  <a:tcPr marL="68580" marR="68580" marT="0" marB="0" anchor="ctr">
+                    <a:solidFill>
+                      <a:schemeClr val="accent4">
+                        <a:lumMod val="50000"/>
+                      </a:schemeClr>
+                    </a:solidFill>
+                  </a:tcPr>
+                </a:tc>
+                <a:tc>
+                  <a:txBody>
+                    <a:bodyPr/>
+                    <a:lstStyle/>
+                    <a:p>
+                      <a:pPr algn="ctr">
+                        <a:lnSpc>
+                          <a:spcPct val="107000"/>
+                        </a:lnSpc>
+                        <a:spcAft>
+                          <a:spcPts val="0"/>
+                        </a:spcAft>
+                      </a:pPr>
+                      <a:r>
+                        <a:rPr lang="es-MX" sz="1800" b="1" kern="1200" dirty="0" err="1">
+                          <a:solidFill>
+                            <a:schemeClr val="dk1"/>
+                          </a:solidFill>
+                          <a:effectLst/>
+                          <a:latin typeface="+mn-lt"/>
+                          <a:ea typeface="+mn-ea"/>
+                          <a:cs typeface="+mn-cs"/>
+                        </a:rPr>
+                        <a:t>capitalize</a:t>
+                      </a:r>
+                      <a:r>
+                        <a:rPr lang="es-MX" sz="1800" b="1" kern="1200" dirty="0">
+                          <a:solidFill>
+                            <a:schemeClr val="dk1"/>
+                          </a:solidFill>
+                          <a:effectLst/>
+                          <a:latin typeface="+mn-lt"/>
+                          <a:ea typeface="+mn-ea"/>
+                          <a:cs typeface="+mn-cs"/>
+                        </a:rPr>
+                        <a:t>()</a:t>
+                      </a:r>
+                    </a:p>
+                  </a:txBody>
+                  <a:tcPr marL="68580" marR="68580" marT="0" marB="0" anchor="ctr">
+                    <a:solidFill>
+                      <a:schemeClr val="accent3">
+                        <a:lumMod val="20000"/>
+                        <a:lumOff val="80000"/>
+                      </a:schemeClr>
+                    </a:solidFill>
+                  </a:tcPr>
+                </a:tc>
+                <a:tc>
+                  <a:txBody>
+                    <a:bodyPr/>
+                    <a:lstStyle/>
+                    <a:p>
+                      <a:pPr algn="ctr">
+                        <a:lnSpc>
+                          <a:spcPct val="107000"/>
+                        </a:lnSpc>
+                        <a:spcAft>
+                          <a:spcPts val="0"/>
+                        </a:spcAft>
+                      </a:pPr>
+                      <a:r>
+                        <a:rPr lang="es-MX" sz="1800" b="1" kern="1200" dirty="0">
+                          <a:solidFill>
+                            <a:schemeClr val="dk1"/>
+                          </a:solidFill>
+                          <a:effectLst/>
+                          <a:latin typeface="+mn-lt"/>
+                          <a:ea typeface="+mn-ea"/>
+                          <a:cs typeface="+mn-cs"/>
+                        </a:rPr>
+                        <a:t>         cadena3=cadena2.capitalize()</a:t>
+                      </a:r>
+                    </a:p>
+                    <a:p>
+                      <a:pPr>
+                        <a:lnSpc>
+                          <a:spcPct val="107000"/>
+                        </a:lnSpc>
+                        <a:spcAft>
+                          <a:spcPts val="0"/>
+                        </a:spcAft>
+                      </a:pPr>
+                      <a:r>
+                        <a:rPr lang="es-MX" sz="1800" b="1" kern="1200" dirty="0">
+                          <a:solidFill>
+                            <a:schemeClr val="dk1"/>
+                          </a:solidFill>
+                          <a:effectLst/>
+                          <a:latin typeface="+mn-lt"/>
+                          <a:ea typeface="+mn-ea"/>
+                          <a:cs typeface="+mn-cs"/>
+                        </a:rPr>
+                        <a:t>              </a:t>
+                      </a:r>
+                      <a:r>
+                        <a:rPr lang="es-MX" sz="1800" b="1" kern="1200" dirty="0" err="1">
+                          <a:solidFill>
+                            <a:schemeClr val="dk1"/>
+                          </a:solidFill>
+                          <a:effectLst/>
+                          <a:latin typeface="+mn-lt"/>
+                          <a:ea typeface="+mn-ea"/>
+                          <a:cs typeface="+mn-cs"/>
+                        </a:rPr>
+                        <a:t>print</a:t>
+                      </a:r>
+                      <a:r>
+                        <a:rPr lang="es-MX" sz="1800" b="1" kern="1200" dirty="0">
+                          <a:solidFill>
+                            <a:schemeClr val="dk1"/>
+                          </a:solidFill>
+                          <a:effectLst/>
+                          <a:latin typeface="+mn-lt"/>
+                          <a:ea typeface="+mn-ea"/>
+                          <a:cs typeface="+mn-cs"/>
+                        </a:rPr>
+                        <a:t>(cadena2)</a:t>
+                      </a:r>
+                    </a:p>
+                    <a:p>
+                      <a:pPr>
+                        <a:lnSpc>
+                          <a:spcPct val="107000"/>
+                        </a:lnSpc>
+                        <a:spcAft>
+                          <a:spcPts val="0"/>
+                        </a:spcAft>
+                      </a:pPr>
+                      <a:r>
+                        <a:rPr lang="es-MX" sz="1800" b="1" kern="1200" dirty="0">
+                          <a:solidFill>
+                            <a:schemeClr val="dk1"/>
+                          </a:solidFill>
+                          <a:effectLst/>
+                          <a:latin typeface="+mn-lt"/>
+                          <a:ea typeface="+mn-ea"/>
+                          <a:cs typeface="+mn-cs"/>
+                        </a:rPr>
+                        <a:t>              </a:t>
+                      </a:r>
+                      <a:r>
+                        <a:rPr lang="es-MX" sz="1800" b="1" kern="1200" dirty="0" err="1">
+                          <a:solidFill>
+                            <a:schemeClr val="dk1"/>
+                          </a:solidFill>
+                          <a:effectLst/>
+                          <a:latin typeface="+mn-lt"/>
+                          <a:ea typeface="+mn-ea"/>
+                          <a:cs typeface="+mn-cs"/>
+                        </a:rPr>
+                        <a:t>print</a:t>
+                      </a:r>
+                      <a:r>
+                        <a:rPr lang="es-MX" sz="1800" b="1" kern="1200" dirty="0">
+                          <a:solidFill>
+                            <a:schemeClr val="dk1"/>
+                          </a:solidFill>
+                          <a:effectLst/>
+                          <a:latin typeface="+mn-lt"/>
+                          <a:ea typeface="+mn-ea"/>
+                          <a:cs typeface="+mn-cs"/>
+                        </a:rPr>
+                        <a:t>(cadena3)</a:t>
+                      </a:r>
+                    </a:p>
+                    <a:p>
+                      <a:pPr>
+                        <a:lnSpc>
+                          <a:spcPct val="107000"/>
+                        </a:lnSpc>
+                        <a:spcAft>
+                          <a:spcPts val="0"/>
+                        </a:spcAft>
+                      </a:pPr>
+                      <a:r>
+                        <a:rPr lang="es-MX" sz="1800" b="0" kern="1200" dirty="0">
+                          <a:solidFill>
+                            <a:schemeClr val="dk1"/>
+                          </a:solidFill>
+                          <a:effectLst/>
+                          <a:latin typeface="+mn-lt"/>
+                          <a:ea typeface="+mn-ea"/>
+                          <a:cs typeface="+mn-cs"/>
+                        </a:rPr>
+                        <a:t>              hola mundo</a:t>
+                      </a:r>
+                    </a:p>
+                    <a:p>
+                      <a:pPr>
+                        <a:lnSpc>
+                          <a:spcPct val="107000"/>
+                        </a:lnSpc>
+                        <a:spcAft>
+                          <a:spcPts val="0"/>
+                        </a:spcAft>
+                      </a:pPr>
+                      <a:r>
+                        <a:rPr lang="es-MX" sz="1800" b="0" kern="1200" dirty="0">
+                          <a:solidFill>
+                            <a:schemeClr val="dk1"/>
+                          </a:solidFill>
+                          <a:effectLst/>
+                          <a:latin typeface="+mn-lt"/>
+                          <a:ea typeface="+mn-ea"/>
+                          <a:cs typeface="+mn-cs"/>
+                        </a:rPr>
+                        <a:t>              </a:t>
+                      </a:r>
+                      <a:r>
+                        <a:rPr lang="es-MX" sz="1800" b="1" kern="1200" dirty="0">
+                          <a:solidFill>
+                            <a:schemeClr val="dk1"/>
+                          </a:solidFill>
+                          <a:effectLst/>
+                          <a:latin typeface="+mn-lt"/>
+                          <a:ea typeface="+mn-ea"/>
+                          <a:cs typeface="+mn-cs"/>
+                        </a:rPr>
+                        <a:t>H</a:t>
+                      </a:r>
+                      <a:r>
+                        <a:rPr lang="es-MX" sz="1800" b="0" kern="1200" dirty="0">
+                          <a:solidFill>
+                            <a:schemeClr val="dk1"/>
+                          </a:solidFill>
+                          <a:effectLst/>
+                          <a:latin typeface="+mn-lt"/>
+                          <a:ea typeface="+mn-ea"/>
+                          <a:cs typeface="+mn-cs"/>
+                        </a:rPr>
+                        <a:t>ola mundo</a:t>
+                      </a:r>
+                      <a:endParaRPr lang="es-MX" sz="1800" b="1" kern="1200" dirty="0">
+                        <a:solidFill>
+                          <a:schemeClr val="dk1"/>
+                        </a:solidFill>
+                        <a:effectLst/>
+                        <a:latin typeface="+mn-lt"/>
+                        <a:ea typeface="+mn-ea"/>
+                        <a:cs typeface="+mn-cs"/>
+                      </a:endParaRPr>
+                    </a:p>
+                  </a:txBody>
+                  <a:tcPr marL="68580" marR="68580" marT="0" marB="0" anchor="ctr">
+                    <a:solidFill>
+                      <a:schemeClr val="accent3">
+                        <a:lumMod val="20000"/>
+                        <a:lumOff val="80000"/>
+                      </a:schemeClr>
+                    </a:solidFill>
+                  </a:tcPr>
+                </a:tc>
+                <a:extLst>
+                  <a:ext uri="{0D108BD9-81ED-4DB2-BD59-A6C34878D82A}">
+                    <a16:rowId xmlns:a16="http://schemas.microsoft.com/office/drawing/2014/main" val="3486814094"/>
+                  </a:ext>
+                </a:extLst>
+              </a:tr>
+            </a:tbl>
+          </a:graphicData>
+        </a:graphic>
+      </p:graphicFrame>
+    </p:spTree>
+    <p:extLst>
+      <p:ext uri="{BB962C8B-B14F-4D97-AF65-F5344CB8AC3E}">
+        <p14:creationId xmlns:p14="http://schemas.microsoft.com/office/powerpoint/2010/main" val="3701752175"/>
       </p:ext>
     </p:extLst>
   </p:cSld>
